--- a/output/wordlabs-load-3day.pptx
+++ b/output/wordlabs-load-3day.pptx
@@ -4240,7 +4240,7 @@
                 <a:ea typeface="Calibri" pitchFamily="34" charset="-122"/>
                 <a:cs typeface="Calibri" pitchFamily="34" charset="-120"/>
               </a:rPr>
-              <a:t>"to carry or burden weight"</a:t>
+              <a:t>"to carry or bear weight"</a:t>
             </a:r>
             <a:endParaRPr lang="en-US" sz="2200" dirty="0"/>
           </a:p>
@@ -5288,7 +5288,7 @@
                 <a:ea typeface="Calibri" pitchFamily="34" charset="-122"/>
                 <a:cs typeface="Calibri" pitchFamily="34" charset="-120"/>
               </a:rPr>
-              <a:t>Word Labs  •  wordlabs.app  •  Root: 'load' = to carry or burden weight</a:t>
+              <a:t>Word Labs  •  wordlabs.app  •  Root: 'load' = to carry or bear weight</a:t>
             </a:r>
             <a:endParaRPr lang="en-US" sz="800" dirty="0"/>
           </a:p>
@@ -5928,7 +5928,7 @@
                 <a:ea typeface="Calibri" pitchFamily="34" charset="-122"/>
                 <a:cs typeface="Calibri" pitchFamily="34" charset="-120"/>
               </a:rPr>
-              <a:t>Word Labs  •  wordlabs.app  •  Root: 'load' = to carry or burden weight</a:t>
+              <a:t>Word Labs  •  wordlabs.app  •  Root: 'load' = to carry or bear weight</a:t>
             </a:r>
             <a:endParaRPr lang="en-US" sz="800" dirty="0"/>
           </a:p>
@@ -6071,7 +6071,7 @@
                 <a:ea typeface="Calibri" pitchFamily="34" charset="-122"/>
                 <a:cs typeface="Calibri" pitchFamily="34" charset="-120"/>
               </a:rPr>
-              <a:t> the shopping, then I will </a:t>
+              <a:t> the car, and then we can </a:t>
             </a:r>
             <a:pPr algn="l" indent="0" marL="0">
               <a:buNone/>
@@ -6102,7 +6102,7 @@
                 <a:ea typeface="Calibri" pitchFamily="34" charset="-122"/>
                 <a:cs typeface="Calibri" pitchFamily="34" charset="-120"/>
               </a:rPr>
-              <a:t> the dishwasher before dinner?</a:t>
+              <a:t> the trolley with our camping gear?</a:t>
             </a:r>
             <a:endParaRPr lang="en-US" sz="1800" dirty="0"/>
           </a:p>
@@ -6716,7 +6716,7 @@
                 <a:ea typeface="Calibri" pitchFamily="34" charset="-122"/>
                 <a:cs typeface="Calibri" pitchFamily="34" charset="-120"/>
               </a:rPr>
-              <a:t>Word Labs  •  wordlabs.app  •  Root: 'load' = to carry or burden weight</a:t>
+              <a:t>Word Labs  •  wordlabs.app  •  Root: 'load' = to carry or bear weight</a:t>
             </a:r>
             <a:endParaRPr lang="en-US" sz="800" dirty="0"/>
           </a:p>
@@ -7543,7 +7543,7 @@
                 <a:ea typeface="Calibri" pitchFamily="34" charset="-122"/>
                 <a:cs typeface="Calibri" pitchFamily="34" charset="-120"/>
               </a:rPr>
-              <a:t>Word Labs  •  wordlabs.app  •  Root: 'load' = to carry or burden weight</a:t>
+              <a:t>Word Labs  •  wordlabs.app  •  Root: 'load' = to carry or bear weight</a:t>
             </a:r>
             <a:endParaRPr lang="en-US" sz="800" dirty="0"/>
           </a:p>
@@ -7860,7 +7860,7 @@
                 <a:ea typeface="Calibri" pitchFamily="34" charset="-122"/>
                 <a:cs typeface="Calibri" pitchFamily="34" charset="-120"/>
               </a:rPr>
-              <a:t>not or reverse</a:t>
+              <a:t>reverse or undo</a:t>
             </a:r>
             <a:endParaRPr lang="en-US" sz="850" dirty="0"/>
           </a:p>
@@ -8528,7 +8528,7 @@
                 <a:ea typeface="Calibri" pitchFamily="34" charset="-122"/>
                 <a:cs typeface="Calibri" pitchFamily="34" charset="-120"/>
               </a:rPr>
-              <a:t>Word Labs  •  wordlabs.app  •  Root: 'load' = to carry or burden weight</a:t>
+              <a:t>Word Labs  •  wordlabs.app  •  Root: 'load' = to carry or bear weight</a:t>
             </a:r>
             <a:endParaRPr lang="en-US" sz="800" dirty="0"/>
           </a:p>
@@ -8845,7 +8845,7 @@
                 <a:ea typeface="Calibri" pitchFamily="34" charset="-122"/>
                 <a:cs typeface="Calibri" pitchFamily="34" charset="-120"/>
               </a:rPr>
-              <a:t>not or reverse</a:t>
+              <a:t>reverse or undo</a:t>
             </a:r>
             <a:endParaRPr lang="en-US" sz="850" dirty="0"/>
           </a:p>
@@ -9645,7 +9645,7 @@
                 <a:ea typeface="Calibri" pitchFamily="34" charset="-122"/>
                 <a:cs typeface="Calibri" pitchFamily="34" charset="-120"/>
               </a:rPr>
-              <a:t>Word Labs  •  wordlabs.app  •  Root: 'load' = to carry or burden weight</a:t>
+              <a:t>Word Labs  •  wordlabs.app  •  Root: 'load' = to carry or bear weight</a:t>
             </a:r>
             <a:endParaRPr lang="en-US" sz="800" dirty="0"/>
           </a:p>
@@ -9962,7 +9962,7 @@
                 <a:ea typeface="Calibri" pitchFamily="34" charset="-122"/>
                 <a:cs typeface="Calibri" pitchFamily="34" charset="-120"/>
               </a:rPr>
-              <a:t>not or reverse</a:t>
+              <a:t>reverse or undo</a:t>
             </a:r>
             <a:endParaRPr lang="en-US" sz="850" dirty="0"/>
           </a:p>
@@ -11053,7 +11053,7 @@
                 <a:ea typeface="Calibri" pitchFamily="34" charset="-122"/>
                 <a:cs typeface="Calibri" pitchFamily="34" charset="-120"/>
               </a:rPr>
-              <a:t>Word Labs  •  wordlabs.app  •  Root: 'load' = to carry or burden weight</a:t>
+              <a:t>Word Labs  •  wordlabs.app  •  Root: 'load' = to carry or bear weight</a:t>
             </a:r>
             <a:endParaRPr lang="en-US" sz="800" dirty="0"/>
           </a:p>
@@ -11880,7 +11880,7 @@
                 <a:ea typeface="Calibri" pitchFamily="34" charset="-122"/>
                 <a:cs typeface="Calibri" pitchFamily="34" charset="-120"/>
               </a:rPr>
-              <a:t>Word Labs  •  wordlabs.app  •  Root: 'load' = to carry or burden weight</a:t>
+              <a:t>Word Labs  •  wordlabs.app  •  Root: 'load' = to carry or bear weight</a:t>
             </a:r>
             <a:endParaRPr lang="en-US" sz="800" dirty="0"/>
           </a:p>
@@ -12865,7 +12865,7 @@
                 <a:ea typeface="Calibri" pitchFamily="34" charset="-122"/>
                 <a:cs typeface="Calibri" pitchFamily="34" charset="-120"/>
               </a:rPr>
-              <a:t>Word Labs  •  wordlabs.app  •  Root: 'load' = to carry or burden weight</a:t>
+              <a:t>Word Labs  •  wordlabs.app  •  Root: 'load' = to carry or bear weight</a:t>
             </a:r>
             <a:endParaRPr lang="en-US" sz="800" dirty="0"/>
           </a:p>
@@ -13891,7 +13891,7 @@
                 <a:ea typeface="Calibri" pitchFamily="34" charset="-122"/>
                 <a:cs typeface="Calibri" pitchFamily="34" charset="-120"/>
               </a:rPr>
-              <a:t>Root 'load' — to carry or burden weight</a:t>
+              <a:t>Root 'load' — to carry or bear weight</a:t>
             </a:r>
             <a:endParaRPr lang="en-US" sz="1600" dirty="0"/>
           </a:p>
@@ -14247,7 +14247,7 @@
                 <a:ea typeface="Calibri" pitchFamily="34" charset="-122"/>
                 <a:cs typeface="Calibri" pitchFamily="34" charset="-120"/>
               </a:rPr>
-              <a:t>Word Labs  •  wordlabs.app  •  Root: 'load' = to carry or burden weight</a:t>
+              <a:t>Word Labs  •  wordlabs.app  •  Root: 'load' = to carry or bear weight</a:t>
             </a:r>
             <a:endParaRPr lang="en-US" sz="800" dirty="0"/>
           </a:p>
@@ -15937,7 +15937,7 @@
                 <a:ea typeface="Calibri" pitchFamily="34" charset="-122"/>
                 <a:cs typeface="Calibri" pitchFamily="34" charset="-120"/>
               </a:rPr>
-              <a:t>Word Labs  •  wordlabs.app  •  Root: 'load' = to carry or burden weight</a:t>
+              <a:t>Word Labs  •  wordlabs.app  •  Root: 'load' = to carry or bear weight</a:t>
             </a:r>
             <a:endParaRPr lang="en-US" sz="800" dirty="0"/>
           </a:p>
@@ -16577,7 +16577,7 @@
                 <a:ea typeface="Calibri" pitchFamily="34" charset="-122"/>
                 <a:cs typeface="Calibri" pitchFamily="34" charset="-120"/>
               </a:rPr>
-              <a:t>Word Labs  •  wordlabs.app  •  Root: 'load' = to carry or burden weight</a:t>
+              <a:t>Word Labs  •  wordlabs.app  •  Root: 'load' = to carry or bear weight</a:t>
             </a:r>
             <a:endParaRPr lang="en-US" sz="800" dirty="0"/>
           </a:p>
@@ -16720,7 +16720,7 @@
                 <a:ea typeface="Calibri" pitchFamily="34" charset="-122"/>
                 <a:cs typeface="Calibri" pitchFamily="34" charset="-120"/>
               </a:rPr>
-              <a:t> the photos, Jake had to </a:t>
+              <a:t> the map, we realised the </a:t>
             </a:r>
             <a:pPr algn="l" indent="0" marL="0">
               <a:buNone/>
@@ -16737,7 +16737,7 @@
                 <a:ea typeface="Calibri" pitchFamily="34" charset="-122"/>
                 <a:cs typeface="Calibri" pitchFamily="34" charset="-120"/>
               </a:rPr>
-              <a:t>unload</a:t>
+              <a:t>overloaded</a:t>
             </a:r>
             <a:pPr algn="l" indent="0" marL="0">
               <a:buNone/>
@@ -16751,7 +16751,7 @@
                 <a:ea typeface="Calibri" pitchFamily="34" charset="-122"/>
                 <a:cs typeface="Calibri" pitchFamily="34" charset="-120"/>
               </a:rPr>
-              <a:t> the camera, but he worried about </a:t>
+              <a:t> backpacks would make </a:t>
             </a:r>
             <a:pPr algn="l" indent="0" marL="0">
               <a:buNone/>
@@ -16768,7 +16768,7 @@
                 <a:ea typeface="Calibri" pitchFamily="34" charset="-122"/>
                 <a:cs typeface="Calibri" pitchFamily="34" charset="-120"/>
               </a:rPr>
-              <a:t>overloading</a:t>
+              <a:t>uploading</a:t>
             </a:r>
             <a:pPr algn="l" indent="0" marL="0">
               <a:buNone/>
@@ -16782,7 +16782,7 @@
                 <a:ea typeface="Calibri" pitchFamily="34" charset="-122"/>
                 <a:cs typeface="Calibri" pitchFamily="34" charset="-120"/>
               </a:rPr>
-              <a:t> the computer's storage.</a:t>
+              <a:t> our photos much harder.</a:t>
             </a:r>
             <a:endParaRPr lang="en-US" sz="1800" dirty="0"/>
           </a:p>
@@ -17065,7 +17065,7 @@
                 <a:ea typeface="Trebuchet MS" pitchFamily="34" charset="-122"/>
                 <a:cs typeface="Trebuchet MS" pitchFamily="34" charset="-120"/>
               </a:rPr>
-              <a:t>unload</a:t>
+              <a:t>overloaded</a:t>
             </a:r>
             <a:endParaRPr lang="en-US" sz="1400" dirty="0"/>
           </a:p>
@@ -17193,7 +17193,7 @@
                 <a:ea typeface="Trebuchet MS" pitchFamily="34" charset="-122"/>
                 <a:cs typeface="Trebuchet MS" pitchFamily="34" charset="-120"/>
               </a:rPr>
-              <a:t>overloading</a:t>
+              <a:t>uploading</a:t>
             </a:r>
             <a:endParaRPr lang="en-US" sz="1400" dirty="0"/>
           </a:p>
@@ -17524,7 +17524,7 @@
                 <a:ea typeface="Calibri" pitchFamily="34" charset="-122"/>
                 <a:cs typeface="Calibri" pitchFamily="34" charset="-120"/>
               </a:rPr>
-              <a:t>Word Labs  •  wordlabs.app  •  Root: 'load' = to carry or burden weight</a:t>
+              <a:t>Word Labs  •  wordlabs.app  •  Root: 'load' = to carry or bear weight</a:t>
             </a:r>
             <a:endParaRPr lang="en-US" sz="800" dirty="0"/>
           </a:p>
@@ -18351,7 +18351,7 @@
                 <a:ea typeface="Calibri" pitchFamily="34" charset="-122"/>
                 <a:cs typeface="Calibri" pitchFamily="34" charset="-120"/>
               </a:rPr>
-              <a:t>Word Labs  •  wordlabs.app  •  Root: 'load' = to carry or burden weight</a:t>
+              <a:t>Word Labs  •  wordlabs.app  •  Root: 'load' = to carry or bear weight</a:t>
             </a:r>
             <a:endParaRPr lang="en-US" sz="800" dirty="0"/>
           </a:p>
@@ -19448,7 +19448,7 @@
                 <a:ea typeface="Calibri" pitchFamily="34" charset="-122"/>
                 <a:cs typeface="Calibri" pitchFamily="34" charset="-120"/>
               </a:rPr>
-              <a:t>Word Labs  •  wordlabs.app  •  Root: 'load' = to carry or burden weight</a:t>
+              <a:t>Word Labs  •  wordlabs.app  •  Root: 'load' = to carry or bear weight</a:t>
             </a:r>
             <a:endParaRPr lang="en-US" sz="800" dirty="0"/>
           </a:p>
@@ -20782,7 +20782,7 @@
                 <a:ea typeface="Calibri" pitchFamily="34" charset="-122"/>
                 <a:cs typeface="Calibri" pitchFamily="34" charset="-120"/>
               </a:rPr>
-              <a:t>Word Labs  •  wordlabs.app  •  Root: 'load' = to carry or burden weight</a:t>
+              <a:t>Word Labs  •  wordlabs.app  •  Root: 'load' = to carry or bear weight</a:t>
             </a:r>
             <a:endParaRPr lang="en-US" sz="800" dirty="0"/>
           </a:p>
@@ -22605,7 +22605,7 @@
                 <a:ea typeface="Calibri" pitchFamily="34" charset="-122"/>
                 <a:cs typeface="Calibri" pitchFamily="34" charset="-120"/>
               </a:rPr>
-              <a:t>Word Labs  •  wordlabs.app  •  Root: 'load' = to carry or burden weight</a:t>
+              <a:t>Word Labs  •  wordlabs.app  •  Root: 'load' = to carry or bear weight</a:t>
             </a:r>
             <a:endParaRPr lang="en-US" sz="800" dirty="0"/>
           </a:p>
@@ -22744,7 +22744,7 @@
                 <a:ea typeface="Trebuchet MS" pitchFamily="34" charset="-122"/>
                 <a:cs typeface="Trebuchet MS" pitchFamily="34" charset="-120"/>
               </a:rPr>
-              <a:t>unload</a:t>
+              <a:t>overloaded</a:t>
             </a:r>
             <a:endParaRPr lang="en-US" sz="2800" dirty="0"/>
           </a:p>
@@ -23432,7 +23432,7 @@
                 <a:ea typeface="Calibri" pitchFamily="34" charset="-122"/>
                 <a:cs typeface="Calibri" pitchFamily="34" charset="-120"/>
               </a:rPr>
-              <a:t>Word Labs  •  wordlabs.app  •  Root: 'load' = to carry or burden weight</a:t>
+              <a:t>Word Labs  •  wordlabs.app  •  Root: 'load' = to carry or bear weight</a:t>
             </a:r>
             <a:endParaRPr lang="en-US" sz="800" dirty="0"/>
           </a:p>
@@ -23571,7 +23571,7 @@
                 <a:ea typeface="Trebuchet MS" pitchFamily="34" charset="-122"/>
                 <a:cs typeface="Trebuchet MS" pitchFamily="34" charset="-120"/>
               </a:rPr>
-              <a:t>unload</a:t>
+              <a:t>overloaded</a:t>
             </a:r>
             <a:endParaRPr lang="en-US" sz="2800" dirty="0"/>
           </a:p>
@@ -23651,7 +23651,7 @@
         </p:nvSpPr>
         <p:spPr>
           <a:xfrm>
-            <a:off x="2938272" y="2258568"/>
+            <a:off x="2221992" y="2258568"/>
             <a:ext cx="1828800" cy="292608"/>
           </a:xfrm>
           <a:prstGeom prst="rect">
@@ -23685,7 +23685,7 @@
         </p:nvSpPr>
         <p:spPr>
           <a:xfrm>
-            <a:off x="2938272" y="2258568"/>
+            <a:off x="2221992" y="2258568"/>
             <a:ext cx="1828800" cy="292608"/>
           </a:xfrm>
           <a:prstGeom prst="rect">
@@ -23710,7 +23710,7 @@
                 <a:ea typeface="Trebuchet MS" pitchFamily="34" charset="-122"/>
                 <a:cs typeface="Trebuchet MS" pitchFamily="34" charset="-120"/>
               </a:rPr>
-              <a:t>un</a:t>
+              <a:t>over</a:t>
             </a:r>
             <a:endParaRPr lang="en-US" sz="1300" dirty="0"/>
           </a:p>
@@ -23724,7 +23724,7 @@
         </p:nvSpPr>
         <p:spPr>
           <a:xfrm>
-            <a:off x="2938272" y="2569464"/>
+            <a:off x="2221992" y="2569464"/>
             <a:ext cx="1828800" cy="201168"/>
           </a:xfrm>
           <a:prstGeom prst="rect">
@@ -23749,7 +23749,7 @@
                 <a:ea typeface="Calibri" pitchFamily="34" charset="-122"/>
                 <a:cs typeface="Calibri" pitchFamily="34" charset="-120"/>
               </a:rPr>
-              <a:t>not or reverse</a:t>
+              <a:t>too much or above</a:t>
             </a:r>
             <a:endParaRPr lang="en-US" sz="850" dirty="0"/>
           </a:p>
@@ -23763,7 +23763,7 @@
         </p:nvSpPr>
         <p:spPr>
           <a:xfrm>
-            <a:off x="5803392" y="2258568"/>
+            <a:off x="4370832" y="2258568"/>
             <a:ext cx="1828800" cy="292608"/>
           </a:xfrm>
           <a:prstGeom prst="rect">
@@ -23797,7 +23797,7 @@
         </p:nvSpPr>
         <p:spPr>
           <a:xfrm>
-            <a:off x="5803392" y="2258568"/>
+            <a:off x="4370832" y="2258568"/>
             <a:ext cx="1828800" cy="292608"/>
           </a:xfrm>
           <a:prstGeom prst="rect">
@@ -23836,7 +23836,7 @@
         </p:nvSpPr>
         <p:spPr>
           <a:xfrm>
-            <a:off x="5803392" y="2569464"/>
+            <a:off x="4370832" y="2569464"/>
             <a:ext cx="1828800" cy="201168"/>
           </a:xfrm>
           <a:prstGeom prst="rect">
@@ -23875,6 +23875,118 @@
         </p:nvSpPr>
         <p:spPr>
           <a:xfrm>
+            <a:off x="6519672" y="2258568"/>
+            <a:ext cx="1828800" cy="292608"/>
+          </a:xfrm>
+          <a:prstGeom prst="rect">
+            <a:avLst>
+              <a:gd name="adj" fmla="val 25000"/>
+            </a:avLst>
+          </a:prstGeom>
+          <a:solidFill>
+            <a:srgbClr val="FCE7F3"/>
+          </a:solidFill>
+          <a:ln w="19050">
+            <a:solidFill>
+              <a:srgbClr val="DB2777"/>
+            </a:solidFill>
+            <a:prstDash val="solid"/>
+          </a:ln>
+          <a:effectLst>
+            <a:outerShdw sx="100000" sy="100000" kx="0" ky="0" algn="bl" rotWithShape="0" blurRad="101600" dist="38100" dir="8100000">
+              <a:srgbClr val="000000">
+                <a:alpha val="12000"/>
+              </a:srgbClr>
+            </a:outerShdw>
+          </a:effectLst>
+        </p:spPr>
+      </p:sp>
+      <p:sp>
+        <p:nvSpPr>
+          <p:cNvPr id="23" name="Text 21"/>
+          <p:cNvSpPr/>
+          <p:nvPr/>
+        </p:nvSpPr>
+        <p:spPr>
+          <a:xfrm>
+            <a:off x="6519672" y="2258568"/>
+            <a:ext cx="1828800" cy="292608"/>
+          </a:xfrm>
+          <a:prstGeom prst="rect">
+            <a:avLst/>
+          </a:prstGeom>
+          <a:noFill/>
+          <a:ln/>
+        </p:spPr>
+        <p:txBody>
+          <a:bodyPr wrap="square" lIns="0" tIns="0" rIns="0" bIns="0" rtlCol="0" anchor="ctr"/>
+          <a:lstStyle/>
+          <a:p>
+            <a:pPr algn="ctr" indent="0" marL="0">
+              <a:buNone/>
+            </a:pPr>
+            <a:r>
+              <a:rPr lang="en-US" sz="1300" b="1" dirty="0">
+                <a:solidFill>
+                  <a:srgbClr val="9D174D"/>
+                </a:solidFill>
+                <a:latin typeface="Trebuchet MS" pitchFamily="34" charset="0"/>
+                <a:ea typeface="Trebuchet MS" pitchFamily="34" charset="-122"/>
+                <a:cs typeface="Trebuchet MS" pitchFamily="34" charset="-120"/>
+              </a:rPr>
+              <a:t>ed</a:t>
+            </a:r>
+            <a:endParaRPr lang="en-US" sz="1300" dirty="0"/>
+          </a:p>
+        </p:txBody>
+      </p:sp>
+      <p:sp>
+        <p:nvSpPr>
+          <p:cNvPr id="24" name="Text 22"/>
+          <p:cNvSpPr/>
+          <p:nvPr/>
+        </p:nvSpPr>
+        <p:spPr>
+          <a:xfrm>
+            <a:off x="6519672" y="2569464"/>
+            <a:ext cx="1828800" cy="201168"/>
+          </a:xfrm>
+          <a:prstGeom prst="rect">
+            <a:avLst/>
+          </a:prstGeom>
+          <a:noFill/>
+          <a:ln/>
+        </p:spPr>
+        <p:txBody>
+          <a:bodyPr wrap="square" lIns="0" tIns="0" rIns="0" bIns="0" rtlCol="0" anchor="t"/>
+          <a:lstStyle/>
+          <a:p>
+            <a:pPr algn="ctr" indent="0" marL="0">
+              <a:buNone/>
+            </a:pPr>
+            <a:r>
+              <a:rPr lang="en-US" sz="850" dirty="0">
+                <a:solidFill>
+                  <a:srgbClr val="475569"/>
+                </a:solidFill>
+                <a:latin typeface="Calibri" pitchFamily="34" charset="0"/>
+                <a:ea typeface="Calibri" pitchFamily="34" charset="-122"/>
+                <a:cs typeface="Calibri" pitchFamily="34" charset="-120"/>
+              </a:rPr>
+              <a:t>in the past</a:t>
+            </a:r>
+            <a:endParaRPr lang="en-US" sz="850" dirty="0"/>
+          </a:p>
+        </p:txBody>
+      </p:sp>
+      <p:sp>
+        <p:nvSpPr>
+          <p:cNvPr id="25" name="Shape 23"/>
+          <p:cNvSpPr/>
+          <p:nvPr/>
+        </p:nvSpPr>
+        <p:spPr>
+          <a:xfrm>
             <a:off x="365760" y="3273552"/>
             <a:ext cx="1371600" cy="658368"/>
           </a:xfrm>
@@ -23896,7 +24008,7 @@
       </p:sp>
       <p:sp>
         <p:nvSpPr>
-          <p:cNvPr id="23" name="Text 21"/>
+          <p:cNvPr id="26" name="Text 24"/>
           <p:cNvSpPr/>
           <p:nvPr/>
         </p:nvSpPr>
@@ -23935,7 +24047,7 @@
       </p:sp>
       <p:sp>
         <p:nvSpPr>
-          <p:cNvPr id="24" name="Shape 22"/>
+          <p:cNvPr id="27" name="Shape 25"/>
           <p:cNvSpPr/>
           <p:nvPr/>
         </p:nvSpPr>
@@ -23962,7 +24074,7 @@
       </p:sp>
       <p:sp>
         <p:nvSpPr>
-          <p:cNvPr id="25" name="Text 23"/>
+          <p:cNvPr id="28" name="Text 26"/>
           <p:cNvSpPr/>
           <p:nvPr/>
         </p:nvSpPr>
@@ -24001,7 +24113,7 @@
       </p:sp>
       <p:sp>
         <p:nvSpPr>
-          <p:cNvPr id="26" name="Shape 24"/>
+          <p:cNvPr id="29" name="Shape 27"/>
           <p:cNvSpPr/>
           <p:nvPr/>
         </p:nvSpPr>
@@ -24028,7 +24140,7 @@
       </p:sp>
       <p:sp>
         <p:nvSpPr>
-          <p:cNvPr id="27" name="Text 25"/>
+          <p:cNvPr id="30" name="Text 28"/>
           <p:cNvSpPr/>
           <p:nvPr/>
         </p:nvSpPr>
@@ -24067,7 +24179,7 @@
       </p:sp>
       <p:sp>
         <p:nvSpPr>
-          <p:cNvPr id="28" name="Shape 26"/>
+          <p:cNvPr id="31" name="Shape 29"/>
           <p:cNvSpPr/>
           <p:nvPr/>
         </p:nvSpPr>
@@ -24094,7 +24206,7 @@
       </p:sp>
       <p:sp>
         <p:nvSpPr>
-          <p:cNvPr id="29" name="Text 27"/>
+          <p:cNvPr id="32" name="Text 30"/>
           <p:cNvSpPr/>
           <p:nvPr/>
         </p:nvSpPr>
@@ -24417,7 +24529,7 @@
                 <a:ea typeface="Calibri" pitchFamily="34" charset="-122"/>
                 <a:cs typeface="Calibri" pitchFamily="34" charset="-120"/>
               </a:rPr>
-              <a:t>Word Labs  •  wordlabs.app  •  Root: 'load' = to carry or burden weight</a:t>
+              <a:t>Word Labs  •  wordlabs.app  •  Root: 'load' = to carry or bear weight</a:t>
             </a:r>
             <a:endParaRPr lang="en-US" sz="800" dirty="0"/>
           </a:p>
@@ -24490,7 +24602,7 @@
                 <a:ea typeface="Trebuchet MS" pitchFamily="34" charset="-122"/>
                 <a:cs typeface="Trebuchet MS" pitchFamily="34" charset="-120"/>
               </a:rPr>
-              <a:t>We are learning that the root 'load' means 'to carry or burden weight'.</a:t>
+              <a:t>We are learning that the root 'load' means 'to carry or bear weight'.</a:t>
             </a:r>
             <a:endParaRPr lang="en-US" sz="2000" dirty="0"/>
           </a:p>
@@ -25136,7 +25248,7 @@
                 <a:ea typeface="Calibri" pitchFamily="34" charset="-122"/>
                 <a:cs typeface="Calibri" pitchFamily="34" charset="-120"/>
               </a:rPr>
-              <a:t>Word Labs  •  wordlabs.app  •  Root: 'load' = to carry or burden weight</a:t>
+              <a:t>Word Labs  •  wordlabs.app  •  Root: 'load' = to carry or bear weight</a:t>
             </a:r>
             <a:endParaRPr lang="en-US" sz="800" dirty="0"/>
           </a:p>
@@ -25275,7 +25387,7 @@
                 <a:ea typeface="Trebuchet MS" pitchFamily="34" charset="-122"/>
                 <a:cs typeface="Trebuchet MS" pitchFamily="34" charset="-120"/>
               </a:rPr>
-              <a:t>unload</a:t>
+              <a:t>overloaded</a:t>
             </a:r>
             <a:endParaRPr lang="en-US" sz="2800" dirty="0"/>
           </a:p>
@@ -25355,7 +25467,7 @@
         </p:nvSpPr>
         <p:spPr>
           <a:xfrm>
-            <a:off x="2938272" y="2258568"/>
+            <a:off x="2221992" y="2258568"/>
             <a:ext cx="1828800" cy="292608"/>
           </a:xfrm>
           <a:prstGeom prst="rect">
@@ -25389,7 +25501,7 @@
         </p:nvSpPr>
         <p:spPr>
           <a:xfrm>
-            <a:off x="2938272" y="2258568"/>
+            <a:off x="2221992" y="2258568"/>
             <a:ext cx="1828800" cy="292608"/>
           </a:xfrm>
           <a:prstGeom prst="rect">
@@ -25414,7 +25526,7 @@
                 <a:ea typeface="Trebuchet MS" pitchFamily="34" charset="-122"/>
                 <a:cs typeface="Trebuchet MS" pitchFamily="34" charset="-120"/>
               </a:rPr>
-              <a:t>un</a:t>
+              <a:t>over</a:t>
             </a:r>
             <a:endParaRPr lang="en-US" sz="1300" dirty="0"/>
           </a:p>
@@ -25428,7 +25540,7 @@
         </p:nvSpPr>
         <p:spPr>
           <a:xfrm>
-            <a:off x="2938272" y="2569464"/>
+            <a:off x="2221992" y="2569464"/>
             <a:ext cx="1828800" cy="201168"/>
           </a:xfrm>
           <a:prstGeom prst="rect">
@@ -25453,7 +25565,7 @@
                 <a:ea typeface="Calibri" pitchFamily="34" charset="-122"/>
                 <a:cs typeface="Calibri" pitchFamily="34" charset="-120"/>
               </a:rPr>
-              <a:t>not or reverse</a:t>
+              <a:t>too much or above</a:t>
             </a:r>
             <a:endParaRPr lang="en-US" sz="850" dirty="0"/>
           </a:p>
@@ -25467,7 +25579,7 @@
         </p:nvSpPr>
         <p:spPr>
           <a:xfrm>
-            <a:off x="5803392" y="2258568"/>
+            <a:off x="4370832" y="2258568"/>
             <a:ext cx="1828800" cy="292608"/>
           </a:xfrm>
           <a:prstGeom prst="rect">
@@ -25501,7 +25613,7 @@
         </p:nvSpPr>
         <p:spPr>
           <a:xfrm>
-            <a:off x="5803392" y="2258568"/>
+            <a:off x="4370832" y="2258568"/>
             <a:ext cx="1828800" cy="292608"/>
           </a:xfrm>
           <a:prstGeom prst="rect">
@@ -25540,7 +25652,7 @@
         </p:nvSpPr>
         <p:spPr>
           <a:xfrm>
-            <a:off x="5803392" y="2569464"/>
+            <a:off x="4370832" y="2569464"/>
             <a:ext cx="1828800" cy="201168"/>
           </a:xfrm>
           <a:prstGeom prst="rect">
@@ -25579,6 +25691,118 @@
         </p:nvSpPr>
         <p:spPr>
           <a:xfrm>
+            <a:off x="6519672" y="2258568"/>
+            <a:ext cx="1828800" cy="292608"/>
+          </a:xfrm>
+          <a:prstGeom prst="rect">
+            <a:avLst>
+              <a:gd name="adj" fmla="val 25000"/>
+            </a:avLst>
+          </a:prstGeom>
+          <a:solidFill>
+            <a:srgbClr val="FCE7F3"/>
+          </a:solidFill>
+          <a:ln w="19050">
+            <a:solidFill>
+              <a:srgbClr val="DB2777"/>
+            </a:solidFill>
+            <a:prstDash val="solid"/>
+          </a:ln>
+          <a:effectLst>
+            <a:outerShdw sx="100000" sy="100000" kx="0" ky="0" algn="bl" rotWithShape="0" blurRad="101600" dist="38100" dir="8100000">
+              <a:srgbClr val="000000">
+                <a:alpha val="12000"/>
+              </a:srgbClr>
+            </a:outerShdw>
+          </a:effectLst>
+        </p:spPr>
+      </p:sp>
+      <p:sp>
+        <p:nvSpPr>
+          <p:cNvPr id="23" name="Text 21"/>
+          <p:cNvSpPr/>
+          <p:nvPr/>
+        </p:nvSpPr>
+        <p:spPr>
+          <a:xfrm>
+            <a:off x="6519672" y="2258568"/>
+            <a:ext cx="1828800" cy="292608"/>
+          </a:xfrm>
+          <a:prstGeom prst="rect">
+            <a:avLst/>
+          </a:prstGeom>
+          <a:noFill/>
+          <a:ln/>
+        </p:spPr>
+        <p:txBody>
+          <a:bodyPr wrap="square" lIns="0" tIns="0" rIns="0" bIns="0" rtlCol="0" anchor="ctr"/>
+          <a:lstStyle/>
+          <a:p>
+            <a:pPr algn="ctr" indent="0" marL="0">
+              <a:buNone/>
+            </a:pPr>
+            <a:r>
+              <a:rPr lang="en-US" sz="1300" b="1" dirty="0">
+                <a:solidFill>
+                  <a:srgbClr val="9D174D"/>
+                </a:solidFill>
+                <a:latin typeface="Trebuchet MS" pitchFamily="34" charset="0"/>
+                <a:ea typeface="Trebuchet MS" pitchFamily="34" charset="-122"/>
+                <a:cs typeface="Trebuchet MS" pitchFamily="34" charset="-120"/>
+              </a:rPr>
+              <a:t>ed</a:t>
+            </a:r>
+            <a:endParaRPr lang="en-US" sz="1300" dirty="0"/>
+          </a:p>
+        </p:txBody>
+      </p:sp>
+      <p:sp>
+        <p:nvSpPr>
+          <p:cNvPr id="24" name="Text 22"/>
+          <p:cNvSpPr/>
+          <p:nvPr/>
+        </p:nvSpPr>
+        <p:spPr>
+          <a:xfrm>
+            <a:off x="6519672" y="2569464"/>
+            <a:ext cx="1828800" cy="201168"/>
+          </a:xfrm>
+          <a:prstGeom prst="rect">
+            <a:avLst/>
+          </a:prstGeom>
+          <a:noFill/>
+          <a:ln/>
+        </p:spPr>
+        <p:txBody>
+          <a:bodyPr wrap="square" lIns="0" tIns="0" rIns="0" bIns="0" rtlCol="0" anchor="t"/>
+          <a:lstStyle/>
+          <a:p>
+            <a:pPr algn="ctr" indent="0" marL="0">
+              <a:buNone/>
+            </a:pPr>
+            <a:r>
+              <a:rPr lang="en-US" sz="850" dirty="0">
+                <a:solidFill>
+                  <a:srgbClr val="475569"/>
+                </a:solidFill>
+                <a:latin typeface="Calibri" pitchFamily="34" charset="0"/>
+                <a:ea typeface="Calibri" pitchFamily="34" charset="-122"/>
+                <a:cs typeface="Calibri" pitchFamily="34" charset="-120"/>
+              </a:rPr>
+              <a:t>in the past</a:t>
+            </a:r>
+            <a:endParaRPr lang="en-US" sz="850" dirty="0"/>
+          </a:p>
+        </p:txBody>
+      </p:sp>
+      <p:sp>
+        <p:nvSpPr>
+          <p:cNvPr id="25" name="Shape 23"/>
+          <p:cNvSpPr/>
+          <p:nvPr/>
+        </p:nvSpPr>
+        <p:spPr>
+          <a:xfrm>
             <a:off x="365760" y="3273552"/>
             <a:ext cx="1371600" cy="658368"/>
           </a:xfrm>
@@ -25600,7 +25824,7 @@
       </p:sp>
       <p:sp>
         <p:nvSpPr>
-          <p:cNvPr id="23" name="Text 21"/>
+          <p:cNvPr id="26" name="Text 24"/>
           <p:cNvSpPr/>
           <p:nvPr/>
         </p:nvSpPr>
@@ -25639,7 +25863,7 @@
       </p:sp>
       <p:sp>
         <p:nvSpPr>
-          <p:cNvPr id="24" name="Shape 22"/>
+          <p:cNvPr id="27" name="Shape 25"/>
           <p:cNvSpPr/>
           <p:nvPr/>
         </p:nvSpPr>
@@ -25666,14 +25890,14 @@
       </p:sp>
       <p:sp>
         <p:nvSpPr>
-          <p:cNvPr id="25" name="Shape 23"/>
-          <p:cNvSpPr/>
-          <p:nvPr/>
-        </p:nvSpPr>
-        <p:spPr>
-          <a:xfrm>
-            <a:off x="2999232" y="3364992"/>
-            <a:ext cx="1645920" cy="475488"/>
+          <p:cNvPr id="28" name="Shape 26"/>
+          <p:cNvSpPr/>
+          <p:nvPr/>
+        </p:nvSpPr>
+        <p:spPr>
+          <a:xfrm>
+            <a:off x="1975104" y="3364992"/>
+            <a:ext cx="1554480" cy="475488"/>
           </a:xfrm>
           <a:prstGeom prst="rect">
             <a:avLst>
@@ -25693,14 +25917,14 @@
       </p:sp>
       <p:sp>
         <p:nvSpPr>
-          <p:cNvPr id="26" name="Text 24"/>
-          <p:cNvSpPr/>
-          <p:nvPr/>
-        </p:nvSpPr>
-        <p:spPr>
-          <a:xfrm>
-            <a:off x="2999232" y="3364992"/>
-            <a:ext cx="1645920" cy="475488"/>
+          <p:cNvPr id="29" name="Text 27"/>
+          <p:cNvSpPr/>
+          <p:nvPr/>
+        </p:nvSpPr>
+        <p:spPr>
+          <a:xfrm>
+            <a:off x="1975104" y="3364992"/>
+            <a:ext cx="1554480" cy="475488"/>
           </a:xfrm>
           <a:prstGeom prst="rect">
             <a:avLst/>
@@ -25724,7 +25948,7 @@
                 <a:ea typeface="Trebuchet MS" pitchFamily="34" charset="-122"/>
                 <a:cs typeface="Trebuchet MS" pitchFamily="34" charset="-120"/>
               </a:rPr>
-              <a:t>un</a:t>
+              <a:t>o</a:t>
             </a:r>
             <a:endParaRPr lang="en-US" sz="1400" dirty="0"/>
           </a:p>
@@ -25732,14 +25956,14 @@
       </p:sp>
       <p:sp>
         <p:nvSpPr>
-          <p:cNvPr id="27" name="Text 25"/>
-          <p:cNvSpPr/>
-          <p:nvPr/>
-        </p:nvSpPr>
-        <p:spPr>
-          <a:xfrm>
-            <a:off x="4645152" y="3364992"/>
-            <a:ext cx="1097280" cy="475488"/>
+          <p:cNvPr id="30" name="Text 28"/>
+          <p:cNvSpPr/>
+          <p:nvPr/>
+        </p:nvSpPr>
+        <p:spPr>
+          <a:xfrm>
+            <a:off x="3529584" y="3364992"/>
+            <a:ext cx="73152" cy="475488"/>
           </a:xfrm>
           <a:prstGeom prst="rect">
             <a:avLst/>
@@ -25771,14 +25995,14 @@
       </p:sp>
       <p:sp>
         <p:nvSpPr>
-          <p:cNvPr id="28" name="Shape 26"/>
-          <p:cNvSpPr/>
-          <p:nvPr/>
-        </p:nvSpPr>
-        <p:spPr>
-          <a:xfrm>
-            <a:off x="5742432" y="3364992"/>
-            <a:ext cx="1645920" cy="475488"/>
+          <p:cNvPr id="31" name="Shape 29"/>
+          <p:cNvSpPr/>
+          <p:nvPr/>
+        </p:nvSpPr>
+        <p:spPr>
+          <a:xfrm>
+            <a:off x="3602736" y="3364992"/>
+            <a:ext cx="1554480" cy="475488"/>
           </a:xfrm>
           <a:prstGeom prst="rect">
             <a:avLst>
@@ -25798,14 +26022,14 @@
       </p:sp>
       <p:sp>
         <p:nvSpPr>
-          <p:cNvPr id="29" name="Text 27"/>
-          <p:cNvSpPr/>
-          <p:nvPr/>
-        </p:nvSpPr>
-        <p:spPr>
-          <a:xfrm>
-            <a:off x="5742432" y="3364992"/>
-            <a:ext cx="1645920" cy="475488"/>
+          <p:cNvPr id="32" name="Text 30"/>
+          <p:cNvSpPr/>
+          <p:nvPr/>
+        </p:nvSpPr>
+        <p:spPr>
+          <a:xfrm>
+            <a:off x="3602736" y="3364992"/>
+            <a:ext cx="1554480" cy="475488"/>
           </a:xfrm>
           <a:prstGeom prst="rect">
             <a:avLst/>
@@ -25829,6 +26053,111 @@
                 <a:ea typeface="Trebuchet MS" pitchFamily="34" charset="-122"/>
                 <a:cs typeface="Trebuchet MS" pitchFamily="34" charset="-120"/>
               </a:rPr>
+              <a:t>ver</a:t>
+            </a:r>
+            <a:endParaRPr lang="en-US" sz="1400" dirty="0"/>
+          </a:p>
+        </p:txBody>
+      </p:sp>
+      <p:sp>
+        <p:nvSpPr>
+          <p:cNvPr id="33" name="Text 31"/>
+          <p:cNvSpPr/>
+          <p:nvPr/>
+        </p:nvSpPr>
+        <p:spPr>
+          <a:xfrm>
+            <a:off x="5157216" y="3364992"/>
+            <a:ext cx="73152" cy="475488"/>
+          </a:xfrm>
+          <a:prstGeom prst="rect">
+            <a:avLst/>
+          </a:prstGeom>
+          <a:noFill/>
+          <a:ln/>
+        </p:spPr>
+        <p:txBody>
+          <a:bodyPr wrap="square" lIns="0" tIns="0" rIns="0" bIns="0" rtlCol="0" anchor="ctr"/>
+          <a:lstStyle/>
+          <a:p>
+            <a:pPr algn="ctr" indent="0" marL="0">
+              <a:buNone/>
+            </a:pPr>
+            <a:r>
+              <a:rPr lang="en-US" sz="1600" b="1" dirty="0">
+                <a:solidFill>
+                  <a:srgbClr val="0D9488"/>
+                </a:solidFill>
+                <a:latin typeface="Trebuchet MS" pitchFamily="34" charset="0"/>
+                <a:ea typeface="Trebuchet MS" pitchFamily="34" charset="-122"/>
+                <a:cs typeface="Trebuchet MS" pitchFamily="34" charset="-120"/>
+              </a:rPr>
+              <a:t>·</a:t>
+            </a:r>
+            <a:endParaRPr lang="en-US" sz="1600" dirty="0"/>
+          </a:p>
+        </p:txBody>
+      </p:sp>
+      <p:sp>
+        <p:nvSpPr>
+          <p:cNvPr id="34" name="Shape 32"/>
+          <p:cNvSpPr/>
+          <p:nvPr/>
+        </p:nvSpPr>
+        <p:spPr>
+          <a:xfrm>
+            <a:off x="5230368" y="3364992"/>
+            <a:ext cx="1554480" cy="475488"/>
+          </a:xfrm>
+          <a:prstGeom prst="rect">
+            <a:avLst>
+              <a:gd name="adj" fmla="val 9615"/>
+            </a:avLst>
+          </a:prstGeom>
+          <a:solidFill>
+            <a:srgbClr val="FFFFFF"/>
+          </a:solidFill>
+          <a:ln w="12700">
+            <a:solidFill>
+              <a:srgbClr val="0D9488"/>
+            </a:solidFill>
+            <a:prstDash val="solid"/>
+          </a:ln>
+        </p:spPr>
+      </p:sp>
+      <p:sp>
+        <p:nvSpPr>
+          <p:cNvPr id="35" name="Text 33"/>
+          <p:cNvSpPr/>
+          <p:nvPr/>
+        </p:nvSpPr>
+        <p:spPr>
+          <a:xfrm>
+            <a:off x="5230368" y="3364992"/>
+            <a:ext cx="1554480" cy="475488"/>
+          </a:xfrm>
+          <a:prstGeom prst="rect">
+            <a:avLst/>
+          </a:prstGeom>
+          <a:noFill/>
+          <a:ln/>
+        </p:spPr>
+        <p:txBody>
+          <a:bodyPr wrap="square" lIns="0" tIns="0" rIns="0" bIns="0" rtlCol="0" anchor="ctr"/>
+          <a:lstStyle/>
+          <a:p>
+            <a:pPr algn="ctr" indent="0" marL="0">
+              <a:buNone/>
+            </a:pPr>
+            <a:r>
+              <a:rPr lang="en-US" sz="1400" b="1" dirty="0">
+                <a:solidFill>
+                  <a:srgbClr val="0D9488"/>
+                </a:solidFill>
+                <a:latin typeface="Trebuchet MS" pitchFamily="34" charset="0"/>
+                <a:ea typeface="Trebuchet MS" pitchFamily="34" charset="-122"/>
+                <a:cs typeface="Trebuchet MS" pitchFamily="34" charset="-120"/>
+              </a:rPr>
               <a:t>load</a:t>
             </a:r>
             <a:endParaRPr lang="en-US" sz="1400" dirty="0"/>
@@ -25837,7 +26166,112 @@
       </p:sp>
       <p:sp>
         <p:nvSpPr>
-          <p:cNvPr id="30" name="Shape 28"/>
+          <p:cNvPr id="36" name="Text 34"/>
+          <p:cNvSpPr/>
+          <p:nvPr/>
+        </p:nvSpPr>
+        <p:spPr>
+          <a:xfrm>
+            <a:off x="6784848" y="3364992"/>
+            <a:ext cx="73152" cy="475488"/>
+          </a:xfrm>
+          <a:prstGeom prst="rect">
+            <a:avLst/>
+          </a:prstGeom>
+          <a:noFill/>
+          <a:ln/>
+        </p:spPr>
+        <p:txBody>
+          <a:bodyPr wrap="square" lIns="0" tIns="0" rIns="0" bIns="0" rtlCol="0" anchor="ctr"/>
+          <a:lstStyle/>
+          <a:p>
+            <a:pPr algn="ctr" indent="0" marL="0">
+              <a:buNone/>
+            </a:pPr>
+            <a:r>
+              <a:rPr lang="en-US" sz="1600" b="1" dirty="0">
+                <a:solidFill>
+                  <a:srgbClr val="0D9488"/>
+                </a:solidFill>
+                <a:latin typeface="Trebuchet MS" pitchFamily="34" charset="0"/>
+                <a:ea typeface="Trebuchet MS" pitchFamily="34" charset="-122"/>
+                <a:cs typeface="Trebuchet MS" pitchFamily="34" charset="-120"/>
+              </a:rPr>
+              <a:t>·</a:t>
+            </a:r>
+            <a:endParaRPr lang="en-US" sz="1600" dirty="0"/>
+          </a:p>
+        </p:txBody>
+      </p:sp>
+      <p:sp>
+        <p:nvSpPr>
+          <p:cNvPr id="37" name="Shape 35"/>
+          <p:cNvSpPr/>
+          <p:nvPr/>
+        </p:nvSpPr>
+        <p:spPr>
+          <a:xfrm>
+            <a:off x="6858000" y="3364992"/>
+            <a:ext cx="1554480" cy="475488"/>
+          </a:xfrm>
+          <a:prstGeom prst="rect">
+            <a:avLst>
+              <a:gd name="adj" fmla="val 9615"/>
+            </a:avLst>
+          </a:prstGeom>
+          <a:solidFill>
+            <a:srgbClr val="FFFFFF"/>
+          </a:solidFill>
+          <a:ln w="12700">
+            <a:solidFill>
+              <a:srgbClr val="0D9488"/>
+            </a:solidFill>
+            <a:prstDash val="solid"/>
+          </a:ln>
+        </p:spPr>
+      </p:sp>
+      <p:sp>
+        <p:nvSpPr>
+          <p:cNvPr id="38" name="Text 36"/>
+          <p:cNvSpPr/>
+          <p:nvPr/>
+        </p:nvSpPr>
+        <p:spPr>
+          <a:xfrm>
+            <a:off x="6858000" y="3364992"/>
+            <a:ext cx="1554480" cy="475488"/>
+          </a:xfrm>
+          <a:prstGeom prst="rect">
+            <a:avLst/>
+          </a:prstGeom>
+          <a:noFill/>
+          <a:ln/>
+        </p:spPr>
+        <p:txBody>
+          <a:bodyPr wrap="square" lIns="0" tIns="0" rIns="0" bIns="0" rtlCol="0" anchor="ctr"/>
+          <a:lstStyle/>
+          <a:p>
+            <a:pPr algn="ctr" indent="0" marL="0">
+              <a:buNone/>
+            </a:pPr>
+            <a:r>
+              <a:rPr lang="en-US" sz="1400" b="1" dirty="0">
+                <a:solidFill>
+                  <a:srgbClr val="0D9488"/>
+                </a:solidFill>
+                <a:latin typeface="Trebuchet MS" pitchFamily="34" charset="0"/>
+                <a:ea typeface="Trebuchet MS" pitchFamily="34" charset="-122"/>
+                <a:cs typeface="Trebuchet MS" pitchFamily="34" charset="-120"/>
+              </a:rPr>
+              <a:t>ed</a:t>
+            </a:r>
+            <a:endParaRPr lang="en-US" sz="1400" dirty="0"/>
+          </a:p>
+        </p:txBody>
+      </p:sp>
+      <p:sp>
+        <p:nvSpPr>
+          <p:cNvPr id="39" name="Shape 37"/>
           <p:cNvSpPr/>
           <p:nvPr/>
         </p:nvSpPr>
@@ -25864,7 +26298,7 @@
       </p:sp>
       <p:sp>
         <p:nvSpPr>
-          <p:cNvPr id="31" name="Text 29"/>
+          <p:cNvPr id="40" name="Text 38"/>
           <p:cNvSpPr/>
           <p:nvPr/>
         </p:nvSpPr>
@@ -25903,7 +26337,7 @@
       </p:sp>
       <p:sp>
         <p:nvSpPr>
-          <p:cNvPr id="32" name="Shape 30"/>
+          <p:cNvPr id="41" name="Shape 39"/>
           <p:cNvSpPr/>
           <p:nvPr/>
         </p:nvSpPr>
@@ -25930,7 +26364,7 @@
       </p:sp>
       <p:sp>
         <p:nvSpPr>
-          <p:cNvPr id="33" name="Text 31"/>
+          <p:cNvPr id="42" name="Text 40"/>
           <p:cNvSpPr/>
           <p:nvPr/>
         </p:nvSpPr>
@@ -26253,7 +26687,7 @@
                 <a:ea typeface="Calibri" pitchFamily="34" charset="-122"/>
                 <a:cs typeface="Calibri" pitchFamily="34" charset="-120"/>
               </a:rPr>
-              <a:t>Word Labs  •  wordlabs.app  •  Root: 'load' = to carry or burden weight</a:t>
+              <a:t>Word Labs  •  wordlabs.app  •  Root: 'load' = to carry or bear weight</a:t>
             </a:r>
             <a:endParaRPr lang="en-US" sz="800" dirty="0"/>
           </a:p>
@@ -26392,7 +26826,7 @@
                 <a:ea typeface="Trebuchet MS" pitchFamily="34" charset="-122"/>
                 <a:cs typeface="Trebuchet MS" pitchFamily="34" charset="-120"/>
               </a:rPr>
-              <a:t>unload</a:t>
+              <a:t>overloaded</a:t>
             </a:r>
             <a:endParaRPr lang="en-US" sz="2800" dirty="0"/>
           </a:p>
@@ -26472,7 +26906,7 @@
         </p:nvSpPr>
         <p:spPr>
           <a:xfrm>
-            <a:off x="2938272" y="2258568"/>
+            <a:off x="2221992" y="2258568"/>
             <a:ext cx="1828800" cy="292608"/>
           </a:xfrm>
           <a:prstGeom prst="rect">
@@ -26506,7 +26940,7 @@
         </p:nvSpPr>
         <p:spPr>
           <a:xfrm>
-            <a:off x="2938272" y="2258568"/>
+            <a:off x="2221992" y="2258568"/>
             <a:ext cx="1828800" cy="292608"/>
           </a:xfrm>
           <a:prstGeom prst="rect">
@@ -26531,7 +26965,7 @@
                 <a:ea typeface="Trebuchet MS" pitchFamily="34" charset="-122"/>
                 <a:cs typeface="Trebuchet MS" pitchFamily="34" charset="-120"/>
               </a:rPr>
-              <a:t>un</a:t>
+              <a:t>over</a:t>
             </a:r>
             <a:endParaRPr lang="en-US" sz="1300" dirty="0"/>
           </a:p>
@@ -26545,7 +26979,7 @@
         </p:nvSpPr>
         <p:spPr>
           <a:xfrm>
-            <a:off x="2938272" y="2569464"/>
+            <a:off x="2221992" y="2569464"/>
             <a:ext cx="1828800" cy="201168"/>
           </a:xfrm>
           <a:prstGeom prst="rect">
@@ -26570,7 +27004,7 @@
                 <a:ea typeface="Calibri" pitchFamily="34" charset="-122"/>
                 <a:cs typeface="Calibri" pitchFamily="34" charset="-120"/>
               </a:rPr>
-              <a:t>not or reverse</a:t>
+              <a:t>too much or above</a:t>
             </a:r>
             <a:endParaRPr lang="en-US" sz="850" dirty="0"/>
           </a:p>
@@ -26584,7 +27018,7 @@
         </p:nvSpPr>
         <p:spPr>
           <a:xfrm>
-            <a:off x="5803392" y="2258568"/>
+            <a:off x="4370832" y="2258568"/>
             <a:ext cx="1828800" cy="292608"/>
           </a:xfrm>
           <a:prstGeom prst="rect">
@@ -26618,7 +27052,7 @@
         </p:nvSpPr>
         <p:spPr>
           <a:xfrm>
-            <a:off x="5803392" y="2258568"/>
+            <a:off x="4370832" y="2258568"/>
             <a:ext cx="1828800" cy="292608"/>
           </a:xfrm>
           <a:prstGeom prst="rect">
@@ -26657,7 +27091,7 @@
         </p:nvSpPr>
         <p:spPr>
           <a:xfrm>
-            <a:off x="5803392" y="2569464"/>
+            <a:off x="4370832" y="2569464"/>
             <a:ext cx="1828800" cy="201168"/>
           </a:xfrm>
           <a:prstGeom prst="rect">
@@ -26696,6 +27130,118 @@
         </p:nvSpPr>
         <p:spPr>
           <a:xfrm>
+            <a:off x="6519672" y="2258568"/>
+            <a:ext cx="1828800" cy="292608"/>
+          </a:xfrm>
+          <a:prstGeom prst="rect">
+            <a:avLst>
+              <a:gd name="adj" fmla="val 25000"/>
+            </a:avLst>
+          </a:prstGeom>
+          <a:solidFill>
+            <a:srgbClr val="FCE7F3"/>
+          </a:solidFill>
+          <a:ln w="19050">
+            <a:solidFill>
+              <a:srgbClr val="DB2777"/>
+            </a:solidFill>
+            <a:prstDash val="solid"/>
+          </a:ln>
+          <a:effectLst>
+            <a:outerShdw sx="100000" sy="100000" kx="0" ky="0" algn="bl" rotWithShape="0" blurRad="101600" dist="38100" dir="8100000">
+              <a:srgbClr val="000000">
+                <a:alpha val="12000"/>
+              </a:srgbClr>
+            </a:outerShdw>
+          </a:effectLst>
+        </p:spPr>
+      </p:sp>
+      <p:sp>
+        <p:nvSpPr>
+          <p:cNvPr id="23" name="Text 21"/>
+          <p:cNvSpPr/>
+          <p:nvPr/>
+        </p:nvSpPr>
+        <p:spPr>
+          <a:xfrm>
+            <a:off x="6519672" y="2258568"/>
+            <a:ext cx="1828800" cy="292608"/>
+          </a:xfrm>
+          <a:prstGeom prst="rect">
+            <a:avLst/>
+          </a:prstGeom>
+          <a:noFill/>
+          <a:ln/>
+        </p:spPr>
+        <p:txBody>
+          <a:bodyPr wrap="square" lIns="0" tIns="0" rIns="0" bIns="0" rtlCol="0" anchor="ctr"/>
+          <a:lstStyle/>
+          <a:p>
+            <a:pPr algn="ctr" indent="0" marL="0">
+              <a:buNone/>
+            </a:pPr>
+            <a:r>
+              <a:rPr lang="en-US" sz="1300" b="1" dirty="0">
+                <a:solidFill>
+                  <a:srgbClr val="9D174D"/>
+                </a:solidFill>
+                <a:latin typeface="Trebuchet MS" pitchFamily="34" charset="0"/>
+                <a:ea typeface="Trebuchet MS" pitchFamily="34" charset="-122"/>
+                <a:cs typeface="Trebuchet MS" pitchFamily="34" charset="-120"/>
+              </a:rPr>
+              <a:t>ed</a:t>
+            </a:r>
+            <a:endParaRPr lang="en-US" sz="1300" dirty="0"/>
+          </a:p>
+        </p:txBody>
+      </p:sp>
+      <p:sp>
+        <p:nvSpPr>
+          <p:cNvPr id="24" name="Text 22"/>
+          <p:cNvSpPr/>
+          <p:nvPr/>
+        </p:nvSpPr>
+        <p:spPr>
+          <a:xfrm>
+            <a:off x="6519672" y="2569464"/>
+            <a:ext cx="1828800" cy="201168"/>
+          </a:xfrm>
+          <a:prstGeom prst="rect">
+            <a:avLst/>
+          </a:prstGeom>
+          <a:noFill/>
+          <a:ln/>
+        </p:spPr>
+        <p:txBody>
+          <a:bodyPr wrap="square" lIns="0" tIns="0" rIns="0" bIns="0" rtlCol="0" anchor="t"/>
+          <a:lstStyle/>
+          <a:p>
+            <a:pPr algn="ctr" indent="0" marL="0">
+              <a:buNone/>
+            </a:pPr>
+            <a:r>
+              <a:rPr lang="en-US" sz="850" dirty="0">
+                <a:solidFill>
+                  <a:srgbClr val="475569"/>
+                </a:solidFill>
+                <a:latin typeface="Calibri" pitchFamily="34" charset="0"/>
+                <a:ea typeface="Calibri" pitchFamily="34" charset="-122"/>
+                <a:cs typeface="Calibri" pitchFamily="34" charset="-120"/>
+              </a:rPr>
+              <a:t>in the past</a:t>
+            </a:r>
+            <a:endParaRPr lang="en-US" sz="850" dirty="0"/>
+          </a:p>
+        </p:txBody>
+      </p:sp>
+      <p:sp>
+        <p:nvSpPr>
+          <p:cNvPr id="25" name="Shape 23"/>
+          <p:cNvSpPr/>
+          <p:nvPr/>
+        </p:nvSpPr>
+        <p:spPr>
+          <a:xfrm>
             <a:off x="365760" y="3273552"/>
             <a:ext cx="1371600" cy="658368"/>
           </a:xfrm>
@@ -26717,7 +27263,7 @@
       </p:sp>
       <p:sp>
         <p:nvSpPr>
-          <p:cNvPr id="23" name="Text 21"/>
+          <p:cNvPr id="26" name="Text 24"/>
           <p:cNvSpPr/>
           <p:nvPr/>
         </p:nvSpPr>
@@ -26756,7 +27302,7 @@
       </p:sp>
       <p:sp>
         <p:nvSpPr>
-          <p:cNvPr id="24" name="Shape 22"/>
+          <p:cNvPr id="27" name="Shape 25"/>
           <p:cNvSpPr/>
           <p:nvPr/>
         </p:nvSpPr>
@@ -26783,14 +27329,14 @@
       </p:sp>
       <p:sp>
         <p:nvSpPr>
-          <p:cNvPr id="25" name="Shape 23"/>
-          <p:cNvSpPr/>
-          <p:nvPr/>
-        </p:nvSpPr>
-        <p:spPr>
-          <a:xfrm>
-            <a:off x="2999232" y="3364992"/>
-            <a:ext cx="1645920" cy="475488"/>
+          <p:cNvPr id="28" name="Shape 26"/>
+          <p:cNvSpPr/>
+          <p:nvPr/>
+        </p:nvSpPr>
+        <p:spPr>
+          <a:xfrm>
+            <a:off x="1975104" y="3364992"/>
+            <a:ext cx="1554480" cy="475488"/>
           </a:xfrm>
           <a:prstGeom prst="rect">
             <a:avLst>
@@ -26810,14 +27356,14 @@
       </p:sp>
       <p:sp>
         <p:nvSpPr>
-          <p:cNvPr id="26" name="Text 24"/>
-          <p:cNvSpPr/>
-          <p:nvPr/>
-        </p:nvSpPr>
-        <p:spPr>
-          <a:xfrm>
-            <a:off x="2999232" y="3364992"/>
-            <a:ext cx="1645920" cy="475488"/>
+          <p:cNvPr id="29" name="Text 27"/>
+          <p:cNvSpPr/>
+          <p:nvPr/>
+        </p:nvSpPr>
+        <p:spPr>
+          <a:xfrm>
+            <a:off x="1975104" y="3364992"/>
+            <a:ext cx="1554480" cy="475488"/>
           </a:xfrm>
           <a:prstGeom prst="rect">
             <a:avLst/>
@@ -26841,7 +27387,7 @@
                 <a:ea typeface="Trebuchet MS" pitchFamily="34" charset="-122"/>
                 <a:cs typeface="Trebuchet MS" pitchFamily="34" charset="-120"/>
               </a:rPr>
-              <a:t>un</a:t>
+              <a:t>o</a:t>
             </a:r>
             <a:endParaRPr lang="en-US" sz="1400" dirty="0"/>
           </a:p>
@@ -26849,14 +27395,14 @@
       </p:sp>
       <p:sp>
         <p:nvSpPr>
-          <p:cNvPr id="27" name="Text 25"/>
-          <p:cNvSpPr/>
-          <p:nvPr/>
-        </p:nvSpPr>
-        <p:spPr>
-          <a:xfrm>
-            <a:off x="4645152" y="3364992"/>
-            <a:ext cx="1097280" cy="475488"/>
+          <p:cNvPr id="30" name="Text 28"/>
+          <p:cNvSpPr/>
+          <p:nvPr/>
+        </p:nvSpPr>
+        <p:spPr>
+          <a:xfrm>
+            <a:off x="3529584" y="3364992"/>
+            <a:ext cx="73152" cy="475488"/>
           </a:xfrm>
           <a:prstGeom prst="rect">
             <a:avLst/>
@@ -26888,14 +27434,14 @@
       </p:sp>
       <p:sp>
         <p:nvSpPr>
-          <p:cNvPr id="28" name="Shape 26"/>
-          <p:cNvSpPr/>
-          <p:nvPr/>
-        </p:nvSpPr>
-        <p:spPr>
-          <a:xfrm>
-            <a:off x="5742432" y="3364992"/>
-            <a:ext cx="1645920" cy="475488"/>
+          <p:cNvPr id="31" name="Shape 29"/>
+          <p:cNvSpPr/>
+          <p:nvPr/>
+        </p:nvSpPr>
+        <p:spPr>
+          <a:xfrm>
+            <a:off x="3602736" y="3364992"/>
+            <a:ext cx="1554480" cy="475488"/>
           </a:xfrm>
           <a:prstGeom prst="rect">
             <a:avLst>
@@ -26915,14 +27461,14 @@
       </p:sp>
       <p:sp>
         <p:nvSpPr>
-          <p:cNvPr id="29" name="Text 27"/>
-          <p:cNvSpPr/>
-          <p:nvPr/>
-        </p:nvSpPr>
-        <p:spPr>
-          <a:xfrm>
-            <a:off x="5742432" y="3364992"/>
-            <a:ext cx="1645920" cy="475488"/>
+          <p:cNvPr id="32" name="Text 30"/>
+          <p:cNvSpPr/>
+          <p:nvPr/>
+        </p:nvSpPr>
+        <p:spPr>
+          <a:xfrm>
+            <a:off x="3602736" y="3364992"/>
+            <a:ext cx="1554480" cy="475488"/>
           </a:xfrm>
           <a:prstGeom prst="rect">
             <a:avLst/>
@@ -26946,6 +27492,111 @@
                 <a:ea typeface="Trebuchet MS" pitchFamily="34" charset="-122"/>
                 <a:cs typeface="Trebuchet MS" pitchFamily="34" charset="-120"/>
               </a:rPr>
+              <a:t>ver</a:t>
+            </a:r>
+            <a:endParaRPr lang="en-US" sz="1400" dirty="0"/>
+          </a:p>
+        </p:txBody>
+      </p:sp>
+      <p:sp>
+        <p:nvSpPr>
+          <p:cNvPr id="33" name="Text 31"/>
+          <p:cNvSpPr/>
+          <p:nvPr/>
+        </p:nvSpPr>
+        <p:spPr>
+          <a:xfrm>
+            <a:off x="5157216" y="3364992"/>
+            <a:ext cx="73152" cy="475488"/>
+          </a:xfrm>
+          <a:prstGeom prst="rect">
+            <a:avLst/>
+          </a:prstGeom>
+          <a:noFill/>
+          <a:ln/>
+        </p:spPr>
+        <p:txBody>
+          <a:bodyPr wrap="square" lIns="0" tIns="0" rIns="0" bIns="0" rtlCol="0" anchor="ctr"/>
+          <a:lstStyle/>
+          <a:p>
+            <a:pPr algn="ctr" indent="0" marL="0">
+              <a:buNone/>
+            </a:pPr>
+            <a:r>
+              <a:rPr lang="en-US" sz="1600" b="1" dirty="0">
+                <a:solidFill>
+                  <a:srgbClr val="0D9488"/>
+                </a:solidFill>
+                <a:latin typeface="Trebuchet MS" pitchFamily="34" charset="0"/>
+                <a:ea typeface="Trebuchet MS" pitchFamily="34" charset="-122"/>
+                <a:cs typeface="Trebuchet MS" pitchFamily="34" charset="-120"/>
+              </a:rPr>
+              <a:t>·</a:t>
+            </a:r>
+            <a:endParaRPr lang="en-US" sz="1600" dirty="0"/>
+          </a:p>
+        </p:txBody>
+      </p:sp>
+      <p:sp>
+        <p:nvSpPr>
+          <p:cNvPr id="34" name="Shape 32"/>
+          <p:cNvSpPr/>
+          <p:nvPr/>
+        </p:nvSpPr>
+        <p:spPr>
+          <a:xfrm>
+            <a:off x="5230368" y="3364992"/>
+            <a:ext cx="1554480" cy="475488"/>
+          </a:xfrm>
+          <a:prstGeom prst="rect">
+            <a:avLst>
+              <a:gd name="adj" fmla="val 9615"/>
+            </a:avLst>
+          </a:prstGeom>
+          <a:solidFill>
+            <a:srgbClr val="FFFFFF"/>
+          </a:solidFill>
+          <a:ln w="12700">
+            <a:solidFill>
+              <a:srgbClr val="0D9488"/>
+            </a:solidFill>
+            <a:prstDash val="solid"/>
+          </a:ln>
+        </p:spPr>
+      </p:sp>
+      <p:sp>
+        <p:nvSpPr>
+          <p:cNvPr id="35" name="Text 33"/>
+          <p:cNvSpPr/>
+          <p:nvPr/>
+        </p:nvSpPr>
+        <p:spPr>
+          <a:xfrm>
+            <a:off x="5230368" y="3364992"/>
+            <a:ext cx="1554480" cy="475488"/>
+          </a:xfrm>
+          <a:prstGeom prst="rect">
+            <a:avLst/>
+          </a:prstGeom>
+          <a:noFill/>
+          <a:ln/>
+        </p:spPr>
+        <p:txBody>
+          <a:bodyPr wrap="square" lIns="0" tIns="0" rIns="0" bIns="0" rtlCol="0" anchor="ctr"/>
+          <a:lstStyle/>
+          <a:p>
+            <a:pPr algn="ctr" indent="0" marL="0">
+              <a:buNone/>
+            </a:pPr>
+            <a:r>
+              <a:rPr lang="en-US" sz="1400" b="1" dirty="0">
+                <a:solidFill>
+                  <a:srgbClr val="0D9488"/>
+                </a:solidFill>
+                <a:latin typeface="Trebuchet MS" pitchFamily="34" charset="0"/>
+                <a:ea typeface="Trebuchet MS" pitchFamily="34" charset="-122"/>
+                <a:cs typeface="Trebuchet MS" pitchFamily="34" charset="-120"/>
+              </a:rPr>
               <a:t>load</a:t>
             </a:r>
             <a:endParaRPr lang="en-US" sz="1400" dirty="0"/>
@@ -26954,7 +27605,112 @@
       </p:sp>
       <p:sp>
         <p:nvSpPr>
-          <p:cNvPr id="30" name="Shape 28"/>
+          <p:cNvPr id="36" name="Text 34"/>
+          <p:cNvSpPr/>
+          <p:nvPr/>
+        </p:nvSpPr>
+        <p:spPr>
+          <a:xfrm>
+            <a:off x="6784848" y="3364992"/>
+            <a:ext cx="73152" cy="475488"/>
+          </a:xfrm>
+          <a:prstGeom prst="rect">
+            <a:avLst/>
+          </a:prstGeom>
+          <a:noFill/>
+          <a:ln/>
+        </p:spPr>
+        <p:txBody>
+          <a:bodyPr wrap="square" lIns="0" tIns="0" rIns="0" bIns="0" rtlCol="0" anchor="ctr"/>
+          <a:lstStyle/>
+          <a:p>
+            <a:pPr algn="ctr" indent="0" marL="0">
+              <a:buNone/>
+            </a:pPr>
+            <a:r>
+              <a:rPr lang="en-US" sz="1600" b="1" dirty="0">
+                <a:solidFill>
+                  <a:srgbClr val="0D9488"/>
+                </a:solidFill>
+                <a:latin typeface="Trebuchet MS" pitchFamily="34" charset="0"/>
+                <a:ea typeface="Trebuchet MS" pitchFamily="34" charset="-122"/>
+                <a:cs typeface="Trebuchet MS" pitchFamily="34" charset="-120"/>
+              </a:rPr>
+              <a:t>·</a:t>
+            </a:r>
+            <a:endParaRPr lang="en-US" sz="1600" dirty="0"/>
+          </a:p>
+        </p:txBody>
+      </p:sp>
+      <p:sp>
+        <p:nvSpPr>
+          <p:cNvPr id="37" name="Shape 35"/>
+          <p:cNvSpPr/>
+          <p:nvPr/>
+        </p:nvSpPr>
+        <p:spPr>
+          <a:xfrm>
+            <a:off x="6858000" y="3364992"/>
+            <a:ext cx="1554480" cy="475488"/>
+          </a:xfrm>
+          <a:prstGeom prst="rect">
+            <a:avLst>
+              <a:gd name="adj" fmla="val 9615"/>
+            </a:avLst>
+          </a:prstGeom>
+          <a:solidFill>
+            <a:srgbClr val="FFFFFF"/>
+          </a:solidFill>
+          <a:ln w="12700">
+            <a:solidFill>
+              <a:srgbClr val="0D9488"/>
+            </a:solidFill>
+            <a:prstDash val="solid"/>
+          </a:ln>
+        </p:spPr>
+      </p:sp>
+      <p:sp>
+        <p:nvSpPr>
+          <p:cNvPr id="38" name="Text 36"/>
+          <p:cNvSpPr/>
+          <p:nvPr/>
+        </p:nvSpPr>
+        <p:spPr>
+          <a:xfrm>
+            <a:off x="6858000" y="3364992"/>
+            <a:ext cx="1554480" cy="475488"/>
+          </a:xfrm>
+          <a:prstGeom prst="rect">
+            <a:avLst/>
+          </a:prstGeom>
+          <a:noFill/>
+          <a:ln/>
+        </p:spPr>
+        <p:txBody>
+          <a:bodyPr wrap="square" lIns="0" tIns="0" rIns="0" bIns="0" rtlCol="0" anchor="ctr"/>
+          <a:lstStyle/>
+          <a:p>
+            <a:pPr algn="ctr" indent="0" marL="0">
+              <a:buNone/>
+            </a:pPr>
+            <a:r>
+              <a:rPr lang="en-US" sz="1400" b="1" dirty="0">
+                <a:solidFill>
+                  <a:srgbClr val="0D9488"/>
+                </a:solidFill>
+                <a:latin typeface="Trebuchet MS" pitchFamily="34" charset="0"/>
+                <a:ea typeface="Trebuchet MS" pitchFamily="34" charset="-122"/>
+                <a:cs typeface="Trebuchet MS" pitchFamily="34" charset="-120"/>
+              </a:rPr>
+              <a:t>ed</a:t>
+            </a:r>
+            <a:endParaRPr lang="en-US" sz="1400" dirty="0"/>
+          </a:p>
+        </p:txBody>
+      </p:sp>
+      <p:sp>
+        <p:nvSpPr>
+          <p:cNvPr id="39" name="Shape 37"/>
           <p:cNvSpPr/>
           <p:nvPr/>
         </p:nvSpPr>
@@ -26981,7 +27737,7 @@
       </p:sp>
       <p:sp>
         <p:nvSpPr>
-          <p:cNvPr id="31" name="Text 29"/>
+          <p:cNvPr id="40" name="Text 38"/>
           <p:cNvSpPr/>
           <p:nvPr/>
         </p:nvSpPr>
@@ -27020,7 +27776,7 @@
       </p:sp>
       <p:sp>
         <p:nvSpPr>
-          <p:cNvPr id="32" name="Shape 30"/>
+          <p:cNvPr id="41" name="Shape 39"/>
           <p:cNvSpPr/>
           <p:nvPr/>
         </p:nvSpPr>
@@ -27047,13 +27803,13 @@
       </p:sp>
       <p:sp>
         <p:nvSpPr>
-          <p:cNvPr id="33" name="Shape 31"/>
-          <p:cNvSpPr/>
-          <p:nvPr/>
-        </p:nvSpPr>
-        <p:spPr>
-          <a:xfrm>
-            <a:off x="2427732" y="4169664"/>
+          <p:cNvPr id="42" name="Shape 40"/>
+          <p:cNvSpPr/>
+          <p:nvPr/>
+        </p:nvSpPr>
+        <p:spPr>
+          <a:xfrm>
+            <a:off x="2023872" y="4169664"/>
             <a:ext cx="685800" cy="475488"/>
           </a:xfrm>
           <a:prstGeom prst="rect">
@@ -27074,13 +27830,13 @@
       </p:sp>
       <p:sp>
         <p:nvSpPr>
-          <p:cNvPr id="34" name="Text 32"/>
-          <p:cNvSpPr/>
-          <p:nvPr/>
-        </p:nvSpPr>
-        <p:spPr>
-          <a:xfrm>
-            <a:off x="2427732" y="4169664"/>
+          <p:cNvPr id="43" name="Text 41"/>
+          <p:cNvSpPr/>
+          <p:nvPr/>
+        </p:nvSpPr>
+        <p:spPr>
+          <a:xfrm>
+            <a:off x="2023872" y="4169664"/>
             <a:ext cx="685800" cy="475488"/>
           </a:xfrm>
           <a:prstGeom prst="rect">
@@ -27105,7 +27861,7 @@
                 <a:ea typeface="Trebuchet MS" pitchFamily="34" charset="-122"/>
                 <a:cs typeface="Trebuchet MS" pitchFamily="34" charset="-120"/>
               </a:rPr>
-              <a:t>u</a:t>
+              <a:t>o</a:t>
             </a:r>
             <a:endParaRPr lang="en-US" sz="900" dirty="0"/>
           </a:p>
@@ -27113,13 +27869,13 @@
       </p:sp>
       <p:sp>
         <p:nvSpPr>
-          <p:cNvPr id="35" name="Shape 33"/>
-          <p:cNvSpPr/>
-          <p:nvPr/>
-        </p:nvSpPr>
-        <p:spPr>
-          <a:xfrm>
-            <a:off x="3639312" y="4169664"/>
+          <p:cNvPr id="44" name="Shape 42"/>
+          <p:cNvSpPr/>
+          <p:nvPr/>
+        </p:nvSpPr>
+        <p:spPr>
+          <a:xfrm>
+            <a:off x="2831592" y="4169664"/>
             <a:ext cx="685800" cy="475488"/>
           </a:xfrm>
           <a:prstGeom prst="rect">
@@ -27140,13 +27896,13 @@
       </p:sp>
       <p:sp>
         <p:nvSpPr>
-          <p:cNvPr id="36" name="Text 34"/>
-          <p:cNvSpPr/>
-          <p:nvPr/>
-        </p:nvSpPr>
-        <p:spPr>
-          <a:xfrm>
-            <a:off x="3639312" y="4169664"/>
+          <p:cNvPr id="45" name="Text 43"/>
+          <p:cNvSpPr/>
+          <p:nvPr/>
+        </p:nvSpPr>
+        <p:spPr>
+          <a:xfrm>
+            <a:off x="2831592" y="4169664"/>
             <a:ext cx="685800" cy="475488"/>
           </a:xfrm>
           <a:prstGeom prst="rect">
@@ -27171,7 +27927,7 @@
                 <a:ea typeface="Trebuchet MS" pitchFamily="34" charset="-122"/>
                 <a:cs typeface="Trebuchet MS" pitchFamily="34" charset="-120"/>
               </a:rPr>
-              <a:t>n</a:t>
+              <a:t>v</a:t>
             </a:r>
             <a:endParaRPr lang="en-US" sz="900" dirty="0"/>
           </a:p>
@@ -27179,13 +27935,13 @@
       </p:sp>
       <p:sp>
         <p:nvSpPr>
-          <p:cNvPr id="37" name="Shape 35"/>
-          <p:cNvSpPr/>
-          <p:nvPr/>
-        </p:nvSpPr>
-        <p:spPr>
-          <a:xfrm>
-            <a:off x="4850892" y="4169664"/>
+          <p:cNvPr id="46" name="Shape 44"/>
+          <p:cNvSpPr/>
+          <p:nvPr/>
+        </p:nvSpPr>
+        <p:spPr>
+          <a:xfrm>
+            <a:off x="3639312" y="4169664"/>
             <a:ext cx="685800" cy="475488"/>
           </a:xfrm>
           <a:prstGeom prst="rect">
@@ -27206,13 +27962,13 @@
       </p:sp>
       <p:sp>
         <p:nvSpPr>
-          <p:cNvPr id="38" name="Text 36"/>
-          <p:cNvSpPr/>
-          <p:nvPr/>
-        </p:nvSpPr>
-        <p:spPr>
-          <a:xfrm>
-            <a:off x="4850892" y="4169664"/>
+          <p:cNvPr id="47" name="Text 45"/>
+          <p:cNvSpPr/>
+          <p:nvPr/>
+        </p:nvSpPr>
+        <p:spPr>
+          <a:xfrm>
+            <a:off x="3639312" y="4169664"/>
             <a:ext cx="685800" cy="475488"/>
           </a:xfrm>
           <a:prstGeom prst="rect">
@@ -27237,7 +27993,7 @@
                 <a:ea typeface="Trebuchet MS" pitchFamily="34" charset="-122"/>
                 <a:cs typeface="Trebuchet MS" pitchFamily="34" charset="-120"/>
               </a:rPr>
-              <a:t>l</a:t>
+              <a:t>er</a:t>
             </a:r>
             <a:endParaRPr lang="en-US" sz="900" dirty="0"/>
           </a:p>
@@ -27245,13 +28001,13 @@
       </p:sp>
       <p:sp>
         <p:nvSpPr>
-          <p:cNvPr id="39" name="Shape 37"/>
-          <p:cNvSpPr/>
-          <p:nvPr/>
-        </p:nvSpPr>
-        <p:spPr>
-          <a:xfrm>
-            <a:off x="6062472" y="4169664"/>
+          <p:cNvPr id="48" name="Shape 46"/>
+          <p:cNvSpPr/>
+          <p:nvPr/>
+        </p:nvSpPr>
+        <p:spPr>
+          <a:xfrm>
+            <a:off x="4447032" y="4169664"/>
             <a:ext cx="685800" cy="475488"/>
           </a:xfrm>
           <a:prstGeom prst="rect">
@@ -27272,13 +28028,13 @@
       </p:sp>
       <p:sp>
         <p:nvSpPr>
-          <p:cNvPr id="40" name="Text 38"/>
-          <p:cNvSpPr/>
-          <p:nvPr/>
-        </p:nvSpPr>
-        <p:spPr>
-          <a:xfrm>
-            <a:off x="6062472" y="4169664"/>
+          <p:cNvPr id="49" name="Text 47"/>
+          <p:cNvSpPr/>
+          <p:nvPr/>
+        </p:nvSpPr>
+        <p:spPr>
+          <a:xfrm>
+            <a:off x="4447032" y="4169664"/>
             <a:ext cx="685800" cy="475488"/>
           </a:xfrm>
           <a:prstGeom prst="rect">
@@ -27303,7 +28059,7 @@
                 <a:ea typeface="Trebuchet MS" pitchFamily="34" charset="-122"/>
                 <a:cs typeface="Trebuchet MS" pitchFamily="34" charset="-120"/>
               </a:rPr>
-              <a:t>oa</a:t>
+              <a:t>l</a:t>
             </a:r>
             <a:endParaRPr lang="en-US" sz="900" dirty="0"/>
           </a:p>
@@ -27311,13 +28067,13 @@
       </p:sp>
       <p:sp>
         <p:nvSpPr>
-          <p:cNvPr id="41" name="Shape 39"/>
-          <p:cNvSpPr/>
-          <p:nvPr/>
-        </p:nvSpPr>
-        <p:spPr>
-          <a:xfrm>
-            <a:off x="7274052" y="4169664"/>
+          <p:cNvPr id="50" name="Shape 48"/>
+          <p:cNvSpPr/>
+          <p:nvPr/>
+        </p:nvSpPr>
+        <p:spPr>
+          <a:xfrm>
+            <a:off x="5254752" y="4169664"/>
             <a:ext cx="685800" cy="475488"/>
           </a:xfrm>
           <a:prstGeom prst="rect">
@@ -27338,13 +28094,211 @@
       </p:sp>
       <p:sp>
         <p:nvSpPr>
-          <p:cNvPr id="42" name="Text 40"/>
-          <p:cNvSpPr/>
-          <p:nvPr/>
-        </p:nvSpPr>
-        <p:spPr>
-          <a:xfrm>
-            <a:off x="7274052" y="4169664"/>
+          <p:cNvPr id="51" name="Text 49"/>
+          <p:cNvSpPr/>
+          <p:nvPr/>
+        </p:nvSpPr>
+        <p:spPr>
+          <a:xfrm>
+            <a:off x="5254752" y="4169664"/>
+            <a:ext cx="685800" cy="475488"/>
+          </a:xfrm>
+          <a:prstGeom prst="rect">
+            <a:avLst/>
+          </a:prstGeom>
+          <a:noFill/>
+          <a:ln/>
+        </p:spPr>
+        <p:txBody>
+          <a:bodyPr wrap="square" lIns="0" tIns="0" rIns="0" bIns="0" rtlCol="0" anchor="ctr"/>
+          <a:lstStyle/>
+          <a:p>
+            <a:pPr algn="ctr" indent="0" marL="0">
+              <a:buNone/>
+            </a:pPr>
+            <a:r>
+              <a:rPr lang="en-US" sz="900" b="1" dirty="0">
+                <a:solidFill>
+                  <a:srgbClr val="9D174D"/>
+                </a:solidFill>
+                <a:latin typeface="Trebuchet MS" pitchFamily="34" charset="0"/>
+                <a:ea typeface="Trebuchet MS" pitchFamily="34" charset="-122"/>
+                <a:cs typeface="Trebuchet MS" pitchFamily="34" charset="-120"/>
+              </a:rPr>
+              <a:t>oa</a:t>
+            </a:r>
+            <a:endParaRPr lang="en-US" sz="900" dirty="0"/>
+          </a:p>
+        </p:txBody>
+      </p:sp>
+      <p:sp>
+        <p:nvSpPr>
+          <p:cNvPr id="52" name="Shape 50"/>
+          <p:cNvSpPr/>
+          <p:nvPr/>
+        </p:nvSpPr>
+        <p:spPr>
+          <a:xfrm>
+            <a:off x="6062472" y="4169664"/>
+            <a:ext cx="685800" cy="475488"/>
+          </a:xfrm>
+          <a:prstGeom prst="rect">
+            <a:avLst>
+              <a:gd name="adj" fmla="val 7692"/>
+            </a:avLst>
+          </a:prstGeom>
+          <a:solidFill>
+            <a:srgbClr val="FFFFFF"/>
+          </a:solidFill>
+          <a:ln w="12700">
+            <a:solidFill>
+              <a:srgbClr val="DB2777"/>
+            </a:solidFill>
+            <a:prstDash val="solid"/>
+          </a:ln>
+        </p:spPr>
+      </p:sp>
+      <p:sp>
+        <p:nvSpPr>
+          <p:cNvPr id="53" name="Text 51"/>
+          <p:cNvSpPr/>
+          <p:nvPr/>
+        </p:nvSpPr>
+        <p:spPr>
+          <a:xfrm>
+            <a:off x="6062472" y="4169664"/>
+            <a:ext cx="685800" cy="475488"/>
+          </a:xfrm>
+          <a:prstGeom prst="rect">
+            <a:avLst/>
+          </a:prstGeom>
+          <a:noFill/>
+          <a:ln/>
+        </p:spPr>
+        <p:txBody>
+          <a:bodyPr wrap="square" lIns="0" tIns="0" rIns="0" bIns="0" rtlCol="0" anchor="ctr"/>
+          <a:lstStyle/>
+          <a:p>
+            <a:pPr algn="ctr" indent="0" marL="0">
+              <a:buNone/>
+            </a:pPr>
+            <a:r>
+              <a:rPr lang="en-US" sz="900" b="1" dirty="0">
+                <a:solidFill>
+                  <a:srgbClr val="9D174D"/>
+                </a:solidFill>
+                <a:latin typeface="Trebuchet MS" pitchFamily="34" charset="0"/>
+                <a:ea typeface="Trebuchet MS" pitchFamily="34" charset="-122"/>
+                <a:cs typeface="Trebuchet MS" pitchFamily="34" charset="-120"/>
+              </a:rPr>
+              <a:t>d</a:t>
+            </a:r>
+            <a:endParaRPr lang="en-US" sz="900" dirty="0"/>
+          </a:p>
+        </p:txBody>
+      </p:sp>
+      <p:sp>
+        <p:nvSpPr>
+          <p:cNvPr id="54" name="Shape 52"/>
+          <p:cNvSpPr/>
+          <p:nvPr/>
+        </p:nvSpPr>
+        <p:spPr>
+          <a:xfrm>
+            <a:off x="6870192" y="4169664"/>
+            <a:ext cx="685800" cy="475488"/>
+          </a:xfrm>
+          <a:prstGeom prst="rect">
+            <a:avLst>
+              <a:gd name="adj" fmla="val 7692"/>
+            </a:avLst>
+          </a:prstGeom>
+          <a:solidFill>
+            <a:srgbClr val="FFFFFF"/>
+          </a:solidFill>
+          <a:ln w="12700">
+            <a:solidFill>
+              <a:srgbClr val="DB2777"/>
+            </a:solidFill>
+            <a:prstDash val="solid"/>
+          </a:ln>
+        </p:spPr>
+      </p:sp>
+      <p:sp>
+        <p:nvSpPr>
+          <p:cNvPr id="55" name="Text 53"/>
+          <p:cNvSpPr/>
+          <p:nvPr/>
+        </p:nvSpPr>
+        <p:spPr>
+          <a:xfrm>
+            <a:off x="6870192" y="4169664"/>
+            <a:ext cx="685800" cy="475488"/>
+          </a:xfrm>
+          <a:prstGeom prst="rect">
+            <a:avLst/>
+          </a:prstGeom>
+          <a:noFill/>
+          <a:ln/>
+        </p:spPr>
+        <p:txBody>
+          <a:bodyPr wrap="square" lIns="0" tIns="0" rIns="0" bIns="0" rtlCol="0" anchor="ctr"/>
+          <a:lstStyle/>
+          <a:p>
+            <a:pPr algn="ctr" indent="0" marL="0">
+              <a:buNone/>
+            </a:pPr>
+            <a:r>
+              <a:rPr lang="en-US" sz="900" b="1" dirty="0">
+                <a:solidFill>
+                  <a:srgbClr val="9D174D"/>
+                </a:solidFill>
+                <a:latin typeface="Trebuchet MS" pitchFamily="34" charset="0"/>
+                <a:ea typeface="Trebuchet MS" pitchFamily="34" charset="-122"/>
+                <a:cs typeface="Trebuchet MS" pitchFamily="34" charset="-120"/>
+              </a:rPr>
+              <a:t>e</a:t>
+            </a:r>
+            <a:endParaRPr lang="en-US" sz="900" dirty="0"/>
+          </a:p>
+        </p:txBody>
+      </p:sp>
+      <p:sp>
+        <p:nvSpPr>
+          <p:cNvPr id="56" name="Shape 54"/>
+          <p:cNvSpPr/>
+          <p:nvPr/>
+        </p:nvSpPr>
+        <p:spPr>
+          <a:xfrm>
+            <a:off x="7677912" y="4169664"/>
+            <a:ext cx="685800" cy="475488"/>
+          </a:xfrm>
+          <a:prstGeom prst="rect">
+            <a:avLst>
+              <a:gd name="adj" fmla="val 7692"/>
+            </a:avLst>
+          </a:prstGeom>
+          <a:solidFill>
+            <a:srgbClr val="FFFFFF"/>
+          </a:solidFill>
+          <a:ln w="12700">
+            <a:solidFill>
+              <a:srgbClr val="DB2777"/>
+            </a:solidFill>
+            <a:prstDash val="solid"/>
+          </a:ln>
+        </p:spPr>
+      </p:sp>
+      <p:sp>
+        <p:nvSpPr>
+          <p:cNvPr id="57" name="Text 55"/>
+          <p:cNvSpPr/>
+          <p:nvPr/>
+        </p:nvSpPr>
+        <p:spPr>
+          <a:xfrm>
+            <a:off x="7677912" y="4169664"/>
             <a:ext cx="685800" cy="475488"/>
           </a:xfrm>
           <a:prstGeom prst="rect">
@@ -27661,7 +28615,7 @@
                 <a:ea typeface="Calibri" pitchFamily="34" charset="-122"/>
                 <a:cs typeface="Calibri" pitchFamily="34" charset="-120"/>
               </a:rPr>
-              <a:t>Word Labs  •  wordlabs.app  •  Root: 'load' = to carry or burden weight</a:t>
+              <a:t>Word Labs  •  wordlabs.app  •  Root: 'load' = to carry or bear weight</a:t>
             </a:r>
             <a:endParaRPr lang="en-US" sz="800" dirty="0"/>
           </a:p>
@@ -27800,7 +28754,7 @@
                 <a:ea typeface="Trebuchet MS" pitchFamily="34" charset="-122"/>
                 <a:cs typeface="Trebuchet MS" pitchFamily="34" charset="-120"/>
               </a:rPr>
-              <a:t>overloading</a:t>
+              <a:t>uploading</a:t>
             </a:r>
             <a:endParaRPr lang="en-US" sz="2800" dirty="0"/>
           </a:p>
@@ -28488,7 +29442,7 @@
                 <a:ea typeface="Calibri" pitchFamily="34" charset="-122"/>
                 <a:cs typeface="Calibri" pitchFamily="34" charset="-120"/>
               </a:rPr>
-              <a:t>Word Labs  •  wordlabs.app  •  Root: 'load' = to carry or burden weight</a:t>
+              <a:t>Word Labs  •  wordlabs.app  •  Root: 'load' = to carry or bear weight</a:t>
             </a:r>
             <a:endParaRPr lang="en-US" sz="800" dirty="0"/>
           </a:p>
@@ -28627,7 +29581,7 @@
                 <a:ea typeface="Trebuchet MS" pitchFamily="34" charset="-122"/>
                 <a:cs typeface="Trebuchet MS" pitchFamily="34" charset="-120"/>
               </a:rPr>
-              <a:t>overloading</a:t>
+              <a:t>uploading</a:t>
             </a:r>
             <a:endParaRPr lang="en-US" sz="2800" dirty="0"/>
           </a:p>
@@ -28766,7 +29720,7 @@
                 <a:ea typeface="Trebuchet MS" pitchFamily="34" charset="-122"/>
                 <a:cs typeface="Trebuchet MS" pitchFamily="34" charset="-120"/>
               </a:rPr>
-              <a:t>over</a:t>
+              <a:t>up</a:t>
             </a:r>
             <a:endParaRPr lang="en-US" sz="1300" dirty="0"/>
           </a:p>
@@ -28805,7 +29759,7 @@
                 <a:ea typeface="Calibri" pitchFamily="34" charset="-122"/>
                 <a:cs typeface="Calibri" pitchFamily="34" charset="-120"/>
               </a:rPr>
-              <a:t>too much or above</a:t>
+              <a:t>from lower to higher</a:t>
             </a:r>
             <a:endParaRPr lang="en-US" sz="850" dirty="0"/>
           </a:p>
@@ -29585,7 +30539,7 @@
                 <a:ea typeface="Calibri" pitchFamily="34" charset="-122"/>
                 <a:cs typeface="Calibri" pitchFamily="34" charset="-120"/>
               </a:rPr>
-              <a:t>Word Labs  •  wordlabs.app  •  Root: 'load' = to carry or burden weight</a:t>
+              <a:t>Word Labs  •  wordlabs.app  •  Root: 'load' = to carry or bear weight</a:t>
             </a:r>
             <a:endParaRPr lang="en-US" sz="800" dirty="0"/>
           </a:p>
@@ -29724,7 +30678,7 @@
                 <a:ea typeface="Trebuchet MS" pitchFamily="34" charset="-122"/>
                 <a:cs typeface="Trebuchet MS" pitchFamily="34" charset="-120"/>
               </a:rPr>
-              <a:t>overloading</a:t>
+              <a:t>uploading</a:t>
             </a:r>
             <a:endParaRPr lang="en-US" sz="2800" dirty="0"/>
           </a:p>
@@ -29863,7 +30817,7 @@
                 <a:ea typeface="Trebuchet MS" pitchFamily="34" charset="-122"/>
                 <a:cs typeface="Trebuchet MS" pitchFamily="34" charset="-120"/>
               </a:rPr>
-              <a:t>over</a:t>
+              <a:t>up</a:t>
             </a:r>
             <a:endParaRPr lang="en-US" sz="1300" dirty="0"/>
           </a:p>
@@ -29902,7 +30856,7 @@
                 <a:ea typeface="Calibri" pitchFamily="34" charset="-122"/>
                 <a:cs typeface="Calibri" pitchFamily="34" charset="-120"/>
               </a:rPr>
-              <a:t>too much or above</a:t>
+              <a:t>from lower to higher</a:t>
             </a:r>
             <a:endParaRPr lang="en-US" sz="850" dirty="0"/>
           </a:p>
@@ -30233,8 +31187,8 @@
         </p:nvSpPr>
         <p:spPr>
           <a:xfrm>
-            <a:off x="1975104" y="3364992"/>
-            <a:ext cx="1554480" cy="475488"/>
+            <a:off x="2313432" y="3364992"/>
+            <a:ext cx="1645920" cy="475488"/>
           </a:xfrm>
           <a:prstGeom prst="rect">
             <a:avLst>
@@ -30260,8 +31214,8 @@
         </p:nvSpPr>
         <p:spPr>
           <a:xfrm>
-            <a:off x="1975104" y="3364992"/>
-            <a:ext cx="1554480" cy="475488"/>
+            <a:off x="2313432" y="3364992"/>
+            <a:ext cx="1645920" cy="475488"/>
           </a:xfrm>
           <a:prstGeom prst="rect">
             <a:avLst/>
@@ -30285,7 +31239,7 @@
                 <a:ea typeface="Trebuchet MS" pitchFamily="34" charset="-122"/>
                 <a:cs typeface="Trebuchet MS" pitchFamily="34" charset="-120"/>
               </a:rPr>
-              <a:t>o</a:t>
+              <a:t>up</a:t>
             </a:r>
             <a:endParaRPr lang="en-US" sz="1400" dirty="0"/>
           </a:p>
@@ -30299,8 +31253,8 @@
         </p:nvSpPr>
         <p:spPr>
           <a:xfrm>
-            <a:off x="3529584" y="3364992"/>
-            <a:ext cx="73152" cy="475488"/>
+            <a:off x="3959352" y="3364992"/>
+            <a:ext cx="411480" cy="475488"/>
           </a:xfrm>
           <a:prstGeom prst="rect">
             <a:avLst/>
@@ -30338,8 +31292,8 @@
         </p:nvSpPr>
         <p:spPr>
           <a:xfrm>
-            <a:off x="3602736" y="3364992"/>
-            <a:ext cx="1554480" cy="475488"/>
+            <a:off x="4370832" y="3364992"/>
+            <a:ext cx="1645920" cy="475488"/>
           </a:xfrm>
           <a:prstGeom prst="rect">
             <a:avLst>
@@ -30365,8 +31319,8 @@
         </p:nvSpPr>
         <p:spPr>
           <a:xfrm>
-            <a:off x="3602736" y="3364992"/>
-            <a:ext cx="1554480" cy="475488"/>
+            <a:off x="4370832" y="3364992"/>
+            <a:ext cx="1645920" cy="475488"/>
           </a:xfrm>
           <a:prstGeom prst="rect">
             <a:avLst/>
@@ -30390,7 +31344,7 @@
                 <a:ea typeface="Trebuchet MS" pitchFamily="34" charset="-122"/>
                 <a:cs typeface="Trebuchet MS" pitchFamily="34" charset="-120"/>
               </a:rPr>
-              <a:t>ver</a:t>
+              <a:t>load</a:t>
             </a:r>
             <a:endParaRPr lang="en-US" sz="1400" dirty="0"/>
           </a:p>
@@ -30404,8 +31358,8 @@
         </p:nvSpPr>
         <p:spPr>
           <a:xfrm>
-            <a:off x="5157216" y="3364992"/>
-            <a:ext cx="73152" cy="475488"/>
+            <a:off x="6016752" y="3364992"/>
+            <a:ext cx="411480" cy="475488"/>
           </a:xfrm>
           <a:prstGeom prst="rect">
             <a:avLst/>
@@ -30443,8 +31397,8 @@
         </p:nvSpPr>
         <p:spPr>
           <a:xfrm>
-            <a:off x="5230368" y="3364992"/>
-            <a:ext cx="1554480" cy="475488"/>
+            <a:off x="6428232" y="3364992"/>
+            <a:ext cx="1645920" cy="475488"/>
           </a:xfrm>
           <a:prstGeom prst="rect">
             <a:avLst>
@@ -30470,8 +31424,8 @@
         </p:nvSpPr>
         <p:spPr>
           <a:xfrm>
-            <a:off x="5230368" y="3364992"/>
-            <a:ext cx="1554480" cy="475488"/>
+            <a:off x="6428232" y="3364992"/>
+            <a:ext cx="1645920" cy="475488"/>
           </a:xfrm>
           <a:prstGeom prst="rect">
             <a:avLst/>
@@ -30495,7 +31449,7 @@
                 <a:ea typeface="Trebuchet MS" pitchFamily="34" charset="-122"/>
                 <a:cs typeface="Trebuchet MS" pitchFamily="34" charset="-120"/>
               </a:rPr>
-              <a:t>load</a:t>
+              <a:t>ing</a:t>
             </a:r>
             <a:endParaRPr lang="en-US" sz="1400" dirty="0"/>
           </a:p>
@@ -30503,119 +31457,80 @@
       </p:sp>
       <p:sp>
         <p:nvSpPr>
-          <p:cNvPr id="36" name="Text 34"/>
-          <p:cNvSpPr/>
-          <p:nvPr/>
-        </p:nvSpPr>
-        <p:spPr>
-          <a:xfrm>
-            <a:off x="6784848" y="3364992"/>
-            <a:ext cx="73152" cy="475488"/>
-          </a:xfrm>
-          <a:prstGeom prst="rect">
-            <a:avLst/>
-          </a:prstGeom>
-          <a:noFill/>
-          <a:ln/>
-        </p:spPr>
-        <p:txBody>
-          <a:bodyPr wrap="square" lIns="0" tIns="0" rIns="0" bIns="0" rtlCol="0" anchor="ctr"/>
-          <a:lstStyle/>
-          <a:p>
-            <a:pPr algn="ctr" indent="0" marL="0">
-              <a:buNone/>
-            </a:pPr>
-            <a:r>
-              <a:rPr lang="en-US" sz="1600" b="1" dirty="0">
-                <a:solidFill>
-                  <a:srgbClr val="0D9488"/>
+          <p:cNvPr id="36" name="Shape 34"/>
+          <p:cNvSpPr/>
+          <p:nvPr/>
+        </p:nvSpPr>
+        <p:spPr>
+          <a:xfrm>
+            <a:off x="365760" y="4096512"/>
+            <a:ext cx="1371600" cy="804672"/>
+          </a:xfrm>
+          <a:prstGeom prst="rect">
+            <a:avLst>
+              <a:gd name="adj" fmla="val 6818"/>
+            </a:avLst>
+          </a:prstGeom>
+          <a:solidFill>
+            <a:srgbClr val="E2E8F0"/>
+          </a:solidFill>
+          <a:ln w="12700">
+            <a:solidFill>
+              <a:srgbClr val="E2E8F0"/>
+            </a:solidFill>
+            <a:prstDash val="solid"/>
+          </a:ln>
+        </p:spPr>
+      </p:sp>
+      <p:sp>
+        <p:nvSpPr>
+          <p:cNvPr id="37" name="Text 35"/>
+          <p:cNvSpPr/>
+          <p:nvPr/>
+        </p:nvSpPr>
+        <p:spPr>
+          <a:xfrm>
+            <a:off x="365760" y="4096512"/>
+            <a:ext cx="1371600" cy="804672"/>
+          </a:xfrm>
+          <a:prstGeom prst="rect">
+            <a:avLst/>
+          </a:prstGeom>
+          <a:noFill/>
+          <a:ln/>
+        </p:spPr>
+        <p:txBody>
+          <a:bodyPr wrap="square" lIns="0" tIns="0" rIns="0" bIns="0" rtlCol="0" anchor="ctr"/>
+          <a:lstStyle/>
+          <a:p>
+            <a:pPr algn="ctr" indent="0" marL="0">
+              <a:buNone/>
+            </a:pPr>
+            <a:r>
+              <a:rPr lang="en-US" sz="1100" b="1" dirty="0">
+                <a:solidFill>
+                  <a:srgbClr val="475569"/>
                 </a:solidFill>
                 <a:latin typeface="Trebuchet MS" pitchFamily="34" charset="0"/>
                 <a:ea typeface="Trebuchet MS" pitchFamily="34" charset="-122"/>
                 <a:cs typeface="Trebuchet MS" pitchFamily="34" charset="-120"/>
               </a:rPr>
-              <a:t>·</a:t>
-            </a:r>
-            <a:endParaRPr lang="en-US" sz="1600" dirty="0"/>
-          </a:p>
-        </p:txBody>
-      </p:sp>
-      <p:sp>
-        <p:nvSpPr>
-          <p:cNvPr id="37" name="Shape 35"/>
-          <p:cNvSpPr/>
-          <p:nvPr/>
-        </p:nvSpPr>
-        <p:spPr>
-          <a:xfrm>
-            <a:off x="6858000" y="3364992"/>
-            <a:ext cx="1554480" cy="475488"/>
-          </a:xfrm>
-          <a:prstGeom prst="rect">
-            <a:avLst>
-              <a:gd name="adj" fmla="val 9615"/>
-            </a:avLst>
-          </a:prstGeom>
-          <a:solidFill>
-            <a:srgbClr val="FFFFFF"/>
-          </a:solidFill>
-          <a:ln w="12700">
-            <a:solidFill>
-              <a:srgbClr val="0D9488"/>
-            </a:solidFill>
-            <a:prstDash val="solid"/>
-          </a:ln>
-        </p:spPr>
-      </p:sp>
-      <p:sp>
-        <p:nvSpPr>
-          <p:cNvPr id="38" name="Text 36"/>
-          <p:cNvSpPr/>
-          <p:nvPr/>
-        </p:nvSpPr>
-        <p:spPr>
-          <a:xfrm>
-            <a:off x="6858000" y="3364992"/>
-            <a:ext cx="1554480" cy="475488"/>
-          </a:xfrm>
-          <a:prstGeom prst="rect">
-            <a:avLst/>
-          </a:prstGeom>
-          <a:noFill/>
-          <a:ln/>
-        </p:spPr>
-        <p:txBody>
-          <a:bodyPr wrap="square" lIns="0" tIns="0" rIns="0" bIns="0" rtlCol="0" anchor="ctr"/>
-          <a:lstStyle/>
-          <a:p>
-            <a:pPr algn="ctr" indent="0" marL="0">
-              <a:buNone/>
-            </a:pPr>
-            <a:r>
-              <a:rPr lang="en-US" sz="1400" b="1" dirty="0">
-                <a:solidFill>
-                  <a:srgbClr val="0D9488"/>
-                </a:solidFill>
-                <a:latin typeface="Trebuchet MS" pitchFamily="34" charset="0"/>
-                <a:ea typeface="Trebuchet MS" pitchFamily="34" charset="-122"/>
-                <a:cs typeface="Trebuchet MS" pitchFamily="34" charset="-120"/>
-              </a:rPr>
-              <a:t>ing</a:t>
-            </a:r>
-            <a:endParaRPr lang="en-US" sz="1400" dirty="0"/>
-          </a:p>
-        </p:txBody>
-      </p:sp>
-      <p:sp>
-        <p:nvSpPr>
-          <p:cNvPr id="39" name="Shape 37"/>
-          <p:cNvSpPr/>
-          <p:nvPr/>
-        </p:nvSpPr>
-        <p:spPr>
-          <a:xfrm>
-            <a:off x="365760" y="4096512"/>
-            <a:ext cx="1371600" cy="804672"/>
+              <a:t>Phonemes</a:t>
+            </a:r>
+            <a:endParaRPr lang="en-US" sz="1100" dirty="0"/>
+          </a:p>
+        </p:txBody>
+      </p:sp>
+      <p:sp>
+        <p:nvSpPr>
+          <p:cNvPr id="38" name="Shape 36"/>
+          <p:cNvSpPr/>
+          <p:nvPr/>
+        </p:nvSpPr>
+        <p:spPr>
+          <a:xfrm>
+            <a:off x="1874520" y="4096512"/>
+            <a:ext cx="6903720" cy="804672"/>
           </a:xfrm>
           <a:prstGeom prst="rect">
             <a:avLst>
@@ -30623,85 +31538,19 @@
             </a:avLst>
           </a:prstGeom>
           <a:solidFill>
-            <a:srgbClr val="E2E8F0"/>
+            <a:srgbClr val="F8FAFC"/>
           </a:solidFill>
           <a:ln w="12700">
             <a:solidFill>
               <a:srgbClr val="E2E8F0"/>
             </a:solidFill>
-            <a:prstDash val="solid"/>
-          </a:ln>
-        </p:spPr>
-      </p:sp>
-      <p:sp>
-        <p:nvSpPr>
-          <p:cNvPr id="40" name="Text 38"/>
-          <p:cNvSpPr/>
-          <p:nvPr/>
-        </p:nvSpPr>
-        <p:spPr>
-          <a:xfrm>
-            <a:off x="365760" y="4096512"/>
-            <a:ext cx="1371600" cy="804672"/>
-          </a:xfrm>
-          <a:prstGeom prst="rect">
-            <a:avLst/>
-          </a:prstGeom>
-          <a:noFill/>
-          <a:ln/>
-        </p:spPr>
-        <p:txBody>
-          <a:bodyPr wrap="square" lIns="0" tIns="0" rIns="0" bIns="0" rtlCol="0" anchor="ctr"/>
-          <a:lstStyle/>
-          <a:p>
-            <a:pPr algn="ctr" indent="0" marL="0">
-              <a:buNone/>
-            </a:pPr>
-            <a:r>
-              <a:rPr lang="en-US" sz="1100" b="1" dirty="0">
-                <a:solidFill>
-                  <a:srgbClr val="475569"/>
-                </a:solidFill>
-                <a:latin typeface="Trebuchet MS" pitchFamily="34" charset="0"/>
-                <a:ea typeface="Trebuchet MS" pitchFamily="34" charset="-122"/>
-                <a:cs typeface="Trebuchet MS" pitchFamily="34" charset="-120"/>
-              </a:rPr>
-              <a:t>Phonemes</a:t>
-            </a:r>
-            <a:endParaRPr lang="en-US" sz="1100" dirty="0"/>
-          </a:p>
-        </p:txBody>
-      </p:sp>
-      <p:sp>
-        <p:nvSpPr>
-          <p:cNvPr id="41" name="Shape 39"/>
-          <p:cNvSpPr/>
-          <p:nvPr/>
-        </p:nvSpPr>
-        <p:spPr>
-          <a:xfrm>
-            <a:off x="1874520" y="4096512"/>
-            <a:ext cx="6903720" cy="804672"/>
-          </a:xfrm>
-          <a:prstGeom prst="rect">
-            <a:avLst>
-              <a:gd name="adj" fmla="val 6818"/>
-            </a:avLst>
-          </a:prstGeom>
-          <a:solidFill>
-            <a:srgbClr val="F8FAFC"/>
-          </a:solidFill>
-          <a:ln w="12700">
-            <a:solidFill>
-              <a:srgbClr val="E2E8F0"/>
-            </a:solidFill>
             <a:prstDash val="dash"/>
           </a:ln>
         </p:spPr>
       </p:sp>
       <p:sp>
         <p:nvSpPr>
-          <p:cNvPr id="42" name="Text 40"/>
+          <p:cNvPr id="39" name="Text 37"/>
           <p:cNvSpPr/>
           <p:nvPr/>
         </p:nvSpPr>
@@ -31024,7 +31873,7 @@
                 <a:ea typeface="Calibri" pitchFamily="34" charset="-122"/>
                 <a:cs typeface="Calibri" pitchFamily="34" charset="-120"/>
               </a:rPr>
-              <a:t>Word Labs  •  wordlabs.app  •  Root: 'load' = to carry or burden weight</a:t>
+              <a:t>Word Labs  •  wordlabs.app  •  Root: 'load' = to carry or bear weight</a:t>
             </a:r>
             <a:endParaRPr lang="en-US" sz="800" dirty="0"/>
           </a:p>
@@ -31163,7 +32012,7 @@
                 <a:ea typeface="Trebuchet MS" pitchFamily="34" charset="-122"/>
                 <a:cs typeface="Trebuchet MS" pitchFamily="34" charset="-120"/>
               </a:rPr>
-              <a:t>overloading</a:t>
+              <a:t>uploading</a:t>
             </a:r>
             <a:endParaRPr lang="en-US" sz="2800" dirty="0"/>
           </a:p>
@@ -31302,7 +32151,7 @@
                 <a:ea typeface="Trebuchet MS" pitchFamily="34" charset="-122"/>
                 <a:cs typeface="Trebuchet MS" pitchFamily="34" charset="-120"/>
               </a:rPr>
-              <a:t>over</a:t>
+              <a:t>up</a:t>
             </a:r>
             <a:endParaRPr lang="en-US" sz="1300" dirty="0"/>
           </a:p>
@@ -31341,7 +32190,7 @@
                 <a:ea typeface="Calibri" pitchFamily="34" charset="-122"/>
                 <a:cs typeface="Calibri" pitchFamily="34" charset="-120"/>
               </a:rPr>
-              <a:t>too much or above</a:t>
+              <a:t>from lower to higher</a:t>
             </a:r>
             <a:endParaRPr lang="en-US" sz="850" dirty="0"/>
           </a:p>
@@ -31672,8 +32521,8 @@
         </p:nvSpPr>
         <p:spPr>
           <a:xfrm>
-            <a:off x="1975104" y="3364992"/>
-            <a:ext cx="1554480" cy="475488"/>
+            <a:off x="2313432" y="3364992"/>
+            <a:ext cx="1645920" cy="475488"/>
           </a:xfrm>
           <a:prstGeom prst="rect">
             <a:avLst>
@@ -31699,8 +32548,8 @@
         </p:nvSpPr>
         <p:spPr>
           <a:xfrm>
-            <a:off x="1975104" y="3364992"/>
-            <a:ext cx="1554480" cy="475488"/>
+            <a:off x="2313432" y="3364992"/>
+            <a:ext cx="1645920" cy="475488"/>
           </a:xfrm>
           <a:prstGeom prst="rect">
             <a:avLst/>
@@ -31724,7 +32573,7 @@
                 <a:ea typeface="Trebuchet MS" pitchFamily="34" charset="-122"/>
                 <a:cs typeface="Trebuchet MS" pitchFamily="34" charset="-120"/>
               </a:rPr>
-              <a:t>o</a:t>
+              <a:t>up</a:t>
             </a:r>
             <a:endParaRPr lang="en-US" sz="1400" dirty="0"/>
           </a:p>
@@ -31738,8 +32587,8 @@
         </p:nvSpPr>
         <p:spPr>
           <a:xfrm>
-            <a:off x="3529584" y="3364992"/>
-            <a:ext cx="73152" cy="475488"/>
+            <a:off x="3959352" y="3364992"/>
+            <a:ext cx="411480" cy="475488"/>
           </a:xfrm>
           <a:prstGeom prst="rect">
             <a:avLst/>
@@ -31777,8 +32626,8 @@
         </p:nvSpPr>
         <p:spPr>
           <a:xfrm>
-            <a:off x="3602736" y="3364992"/>
-            <a:ext cx="1554480" cy="475488"/>
+            <a:off x="4370832" y="3364992"/>
+            <a:ext cx="1645920" cy="475488"/>
           </a:xfrm>
           <a:prstGeom prst="rect">
             <a:avLst>
@@ -31804,8 +32653,8 @@
         </p:nvSpPr>
         <p:spPr>
           <a:xfrm>
-            <a:off x="3602736" y="3364992"/>
-            <a:ext cx="1554480" cy="475488"/>
+            <a:off x="4370832" y="3364992"/>
+            <a:ext cx="1645920" cy="475488"/>
           </a:xfrm>
           <a:prstGeom prst="rect">
             <a:avLst/>
@@ -31829,7 +32678,7 @@
                 <a:ea typeface="Trebuchet MS" pitchFamily="34" charset="-122"/>
                 <a:cs typeface="Trebuchet MS" pitchFamily="34" charset="-120"/>
               </a:rPr>
-              <a:t>ver</a:t>
+              <a:t>load</a:t>
             </a:r>
             <a:endParaRPr lang="en-US" sz="1400" dirty="0"/>
           </a:p>
@@ -31843,8 +32692,8 @@
         </p:nvSpPr>
         <p:spPr>
           <a:xfrm>
-            <a:off x="5157216" y="3364992"/>
-            <a:ext cx="73152" cy="475488"/>
+            <a:off x="6016752" y="3364992"/>
+            <a:ext cx="411480" cy="475488"/>
           </a:xfrm>
           <a:prstGeom prst="rect">
             <a:avLst/>
@@ -31882,8 +32731,8 @@
         </p:nvSpPr>
         <p:spPr>
           <a:xfrm>
-            <a:off x="5230368" y="3364992"/>
-            <a:ext cx="1554480" cy="475488"/>
+            <a:off x="6428232" y="3364992"/>
+            <a:ext cx="1645920" cy="475488"/>
           </a:xfrm>
           <a:prstGeom prst="rect">
             <a:avLst>
@@ -31909,8 +32758,8 @@
         </p:nvSpPr>
         <p:spPr>
           <a:xfrm>
-            <a:off x="5230368" y="3364992"/>
-            <a:ext cx="1554480" cy="475488"/>
+            <a:off x="6428232" y="3364992"/>
+            <a:ext cx="1645920" cy="475488"/>
           </a:xfrm>
           <a:prstGeom prst="rect">
             <a:avLst/>
@@ -31934,7 +32783,7 @@
                 <a:ea typeface="Trebuchet MS" pitchFamily="34" charset="-122"/>
                 <a:cs typeface="Trebuchet MS" pitchFamily="34" charset="-120"/>
               </a:rPr>
-              <a:t>load</a:t>
+              <a:t>ing</a:t>
             </a:r>
             <a:endParaRPr lang="en-US" sz="1400" dirty="0"/>
           </a:p>
@@ -31942,211 +32791,238 @@
       </p:sp>
       <p:sp>
         <p:nvSpPr>
-          <p:cNvPr id="36" name="Text 34"/>
-          <p:cNvSpPr/>
-          <p:nvPr/>
-        </p:nvSpPr>
-        <p:spPr>
-          <a:xfrm>
-            <a:off x="6784848" y="3364992"/>
-            <a:ext cx="73152" cy="475488"/>
-          </a:xfrm>
-          <a:prstGeom prst="rect">
-            <a:avLst/>
-          </a:prstGeom>
-          <a:noFill/>
-          <a:ln/>
-        </p:spPr>
-        <p:txBody>
-          <a:bodyPr wrap="square" lIns="0" tIns="0" rIns="0" bIns="0" rtlCol="0" anchor="ctr"/>
-          <a:lstStyle/>
-          <a:p>
-            <a:pPr algn="ctr" indent="0" marL="0">
-              <a:buNone/>
-            </a:pPr>
-            <a:r>
-              <a:rPr lang="en-US" sz="1600" b="1" dirty="0">
-                <a:solidFill>
-                  <a:srgbClr val="0D9488"/>
+          <p:cNvPr id="36" name="Shape 34"/>
+          <p:cNvSpPr/>
+          <p:nvPr/>
+        </p:nvSpPr>
+        <p:spPr>
+          <a:xfrm>
+            <a:off x="365760" y="4096512"/>
+            <a:ext cx="1371600" cy="804672"/>
+          </a:xfrm>
+          <a:prstGeom prst="rect">
+            <a:avLst>
+              <a:gd name="adj" fmla="val 6818"/>
+            </a:avLst>
+          </a:prstGeom>
+          <a:solidFill>
+            <a:srgbClr val="E2E8F0"/>
+          </a:solidFill>
+          <a:ln w="12700">
+            <a:solidFill>
+              <a:srgbClr val="E2E8F0"/>
+            </a:solidFill>
+            <a:prstDash val="solid"/>
+          </a:ln>
+        </p:spPr>
+      </p:sp>
+      <p:sp>
+        <p:nvSpPr>
+          <p:cNvPr id="37" name="Text 35"/>
+          <p:cNvSpPr/>
+          <p:nvPr/>
+        </p:nvSpPr>
+        <p:spPr>
+          <a:xfrm>
+            <a:off x="365760" y="4096512"/>
+            <a:ext cx="1371600" cy="804672"/>
+          </a:xfrm>
+          <a:prstGeom prst="rect">
+            <a:avLst/>
+          </a:prstGeom>
+          <a:noFill/>
+          <a:ln/>
+        </p:spPr>
+        <p:txBody>
+          <a:bodyPr wrap="square" lIns="0" tIns="0" rIns="0" bIns="0" rtlCol="0" anchor="ctr"/>
+          <a:lstStyle/>
+          <a:p>
+            <a:pPr algn="ctr" indent="0" marL="0">
+              <a:buNone/>
+            </a:pPr>
+            <a:r>
+              <a:rPr lang="en-US" sz="1100" b="1" dirty="0">
+                <a:solidFill>
+                  <a:srgbClr val="475569"/>
                 </a:solidFill>
                 <a:latin typeface="Trebuchet MS" pitchFamily="34" charset="0"/>
                 <a:ea typeface="Trebuchet MS" pitchFamily="34" charset="-122"/>
                 <a:cs typeface="Trebuchet MS" pitchFamily="34" charset="-120"/>
               </a:rPr>
-              <a:t>·</a:t>
-            </a:r>
-            <a:endParaRPr lang="en-US" sz="1600" dirty="0"/>
-          </a:p>
-        </p:txBody>
-      </p:sp>
-      <p:sp>
-        <p:nvSpPr>
-          <p:cNvPr id="37" name="Shape 35"/>
-          <p:cNvSpPr/>
-          <p:nvPr/>
-        </p:nvSpPr>
-        <p:spPr>
-          <a:xfrm>
-            <a:off x="6858000" y="3364992"/>
-            <a:ext cx="1554480" cy="475488"/>
+              <a:t>Phonemes</a:t>
+            </a:r>
+            <a:endParaRPr lang="en-US" sz="1100" dirty="0"/>
+          </a:p>
+        </p:txBody>
+      </p:sp>
+      <p:sp>
+        <p:nvSpPr>
+          <p:cNvPr id="38" name="Shape 36"/>
+          <p:cNvSpPr/>
+          <p:nvPr/>
+        </p:nvSpPr>
+        <p:spPr>
+          <a:xfrm>
+            <a:off x="1874520" y="4096512"/>
+            <a:ext cx="6903720" cy="658368"/>
           </a:xfrm>
           <a:prstGeom prst="rect">
             <a:avLst>
-              <a:gd name="adj" fmla="val 9615"/>
+              <a:gd name="adj" fmla="val 8333"/>
             </a:avLst>
           </a:prstGeom>
           <a:solidFill>
+            <a:srgbClr val="FCE7F3"/>
+          </a:solidFill>
+          <a:ln w="12700">
+            <a:solidFill>
+              <a:srgbClr val="DB2777"/>
+            </a:solidFill>
+            <a:prstDash val="solid"/>
+          </a:ln>
+        </p:spPr>
+      </p:sp>
+      <p:sp>
+        <p:nvSpPr>
+          <p:cNvPr id="39" name="Shape 37"/>
+          <p:cNvSpPr/>
+          <p:nvPr/>
+        </p:nvSpPr>
+        <p:spPr>
+          <a:xfrm>
+            <a:off x="2124837" y="4169664"/>
+            <a:ext cx="685800" cy="475488"/>
+          </a:xfrm>
+          <a:prstGeom prst="rect">
+            <a:avLst>
+              <a:gd name="adj" fmla="val 7692"/>
+            </a:avLst>
+          </a:prstGeom>
+          <a:solidFill>
             <a:srgbClr val="FFFFFF"/>
           </a:solidFill>
           <a:ln w="12700">
             <a:solidFill>
-              <a:srgbClr val="0D9488"/>
-            </a:solidFill>
-            <a:prstDash val="solid"/>
-          </a:ln>
-        </p:spPr>
-      </p:sp>
-      <p:sp>
-        <p:nvSpPr>
-          <p:cNvPr id="38" name="Text 36"/>
-          <p:cNvSpPr/>
-          <p:nvPr/>
-        </p:nvSpPr>
-        <p:spPr>
-          <a:xfrm>
-            <a:off x="6858000" y="3364992"/>
-            <a:ext cx="1554480" cy="475488"/>
-          </a:xfrm>
-          <a:prstGeom prst="rect">
-            <a:avLst/>
-          </a:prstGeom>
-          <a:noFill/>
-          <a:ln/>
-        </p:spPr>
-        <p:txBody>
-          <a:bodyPr wrap="square" lIns="0" tIns="0" rIns="0" bIns="0" rtlCol="0" anchor="ctr"/>
-          <a:lstStyle/>
-          <a:p>
-            <a:pPr algn="ctr" indent="0" marL="0">
-              <a:buNone/>
-            </a:pPr>
-            <a:r>
-              <a:rPr lang="en-US" sz="1400" b="1" dirty="0">
-                <a:solidFill>
-                  <a:srgbClr val="0D9488"/>
+              <a:srgbClr val="DB2777"/>
+            </a:solidFill>
+            <a:prstDash val="solid"/>
+          </a:ln>
+        </p:spPr>
+      </p:sp>
+      <p:sp>
+        <p:nvSpPr>
+          <p:cNvPr id="40" name="Text 38"/>
+          <p:cNvSpPr/>
+          <p:nvPr/>
+        </p:nvSpPr>
+        <p:spPr>
+          <a:xfrm>
+            <a:off x="2124837" y="4169664"/>
+            <a:ext cx="685800" cy="475488"/>
+          </a:xfrm>
+          <a:prstGeom prst="rect">
+            <a:avLst/>
+          </a:prstGeom>
+          <a:noFill/>
+          <a:ln/>
+        </p:spPr>
+        <p:txBody>
+          <a:bodyPr wrap="square" lIns="0" tIns="0" rIns="0" bIns="0" rtlCol="0" anchor="ctr"/>
+          <a:lstStyle/>
+          <a:p>
+            <a:pPr algn="ctr" indent="0" marL="0">
+              <a:buNone/>
+            </a:pPr>
+            <a:r>
+              <a:rPr lang="en-US" sz="900" b="1" dirty="0">
+                <a:solidFill>
+                  <a:srgbClr val="9D174D"/>
                 </a:solidFill>
                 <a:latin typeface="Trebuchet MS" pitchFamily="34" charset="0"/>
                 <a:ea typeface="Trebuchet MS" pitchFamily="34" charset="-122"/>
                 <a:cs typeface="Trebuchet MS" pitchFamily="34" charset="-120"/>
               </a:rPr>
-              <a:t>ing</a:t>
-            </a:r>
-            <a:endParaRPr lang="en-US" sz="1400" dirty="0"/>
-          </a:p>
-        </p:txBody>
-      </p:sp>
-      <p:sp>
-        <p:nvSpPr>
-          <p:cNvPr id="39" name="Shape 37"/>
-          <p:cNvSpPr/>
-          <p:nvPr/>
-        </p:nvSpPr>
-        <p:spPr>
-          <a:xfrm>
-            <a:off x="365760" y="4096512"/>
-            <a:ext cx="1371600" cy="804672"/>
+              <a:t>u</a:t>
+            </a:r>
+            <a:endParaRPr lang="en-US" sz="900" dirty="0"/>
+          </a:p>
+        </p:txBody>
+      </p:sp>
+      <p:sp>
+        <p:nvSpPr>
+          <p:cNvPr id="41" name="Shape 39"/>
+          <p:cNvSpPr/>
+          <p:nvPr/>
+        </p:nvSpPr>
+        <p:spPr>
+          <a:xfrm>
+            <a:off x="3033522" y="4169664"/>
+            <a:ext cx="685800" cy="475488"/>
           </a:xfrm>
           <a:prstGeom prst="rect">
             <a:avLst>
-              <a:gd name="adj" fmla="val 6818"/>
+              <a:gd name="adj" fmla="val 7692"/>
             </a:avLst>
           </a:prstGeom>
           <a:solidFill>
-            <a:srgbClr val="E2E8F0"/>
-          </a:solidFill>
-          <a:ln w="12700">
-            <a:solidFill>
-              <a:srgbClr val="E2E8F0"/>
-            </a:solidFill>
-            <a:prstDash val="solid"/>
-          </a:ln>
-        </p:spPr>
-      </p:sp>
-      <p:sp>
-        <p:nvSpPr>
-          <p:cNvPr id="40" name="Text 38"/>
-          <p:cNvSpPr/>
-          <p:nvPr/>
-        </p:nvSpPr>
-        <p:spPr>
-          <a:xfrm>
-            <a:off x="365760" y="4096512"/>
-            <a:ext cx="1371600" cy="804672"/>
-          </a:xfrm>
-          <a:prstGeom prst="rect">
-            <a:avLst/>
-          </a:prstGeom>
-          <a:noFill/>
-          <a:ln/>
-        </p:spPr>
-        <p:txBody>
-          <a:bodyPr wrap="square" lIns="0" tIns="0" rIns="0" bIns="0" rtlCol="0" anchor="ctr"/>
-          <a:lstStyle/>
-          <a:p>
-            <a:pPr algn="ctr" indent="0" marL="0">
-              <a:buNone/>
-            </a:pPr>
-            <a:r>
-              <a:rPr lang="en-US" sz="1100" b="1" dirty="0">
-                <a:solidFill>
-                  <a:srgbClr val="475569"/>
+            <a:srgbClr val="FFFFFF"/>
+          </a:solidFill>
+          <a:ln w="12700">
+            <a:solidFill>
+              <a:srgbClr val="DB2777"/>
+            </a:solidFill>
+            <a:prstDash val="solid"/>
+          </a:ln>
+        </p:spPr>
+      </p:sp>
+      <p:sp>
+        <p:nvSpPr>
+          <p:cNvPr id="42" name="Text 40"/>
+          <p:cNvSpPr/>
+          <p:nvPr/>
+        </p:nvSpPr>
+        <p:spPr>
+          <a:xfrm>
+            <a:off x="3033522" y="4169664"/>
+            <a:ext cx="685800" cy="475488"/>
+          </a:xfrm>
+          <a:prstGeom prst="rect">
+            <a:avLst/>
+          </a:prstGeom>
+          <a:noFill/>
+          <a:ln/>
+        </p:spPr>
+        <p:txBody>
+          <a:bodyPr wrap="square" lIns="0" tIns="0" rIns="0" bIns="0" rtlCol="0" anchor="ctr"/>
+          <a:lstStyle/>
+          <a:p>
+            <a:pPr algn="ctr" indent="0" marL="0">
+              <a:buNone/>
+            </a:pPr>
+            <a:r>
+              <a:rPr lang="en-US" sz="900" b="1" dirty="0">
+                <a:solidFill>
+                  <a:srgbClr val="9D174D"/>
                 </a:solidFill>
                 <a:latin typeface="Trebuchet MS" pitchFamily="34" charset="0"/>
                 <a:ea typeface="Trebuchet MS" pitchFamily="34" charset="-122"/>
                 <a:cs typeface="Trebuchet MS" pitchFamily="34" charset="-120"/>
               </a:rPr>
-              <a:t>Phonemes</a:t>
-            </a:r>
-            <a:endParaRPr lang="en-US" sz="1100" dirty="0"/>
-          </a:p>
-        </p:txBody>
-      </p:sp>
-      <p:sp>
-        <p:nvSpPr>
-          <p:cNvPr id="41" name="Shape 39"/>
-          <p:cNvSpPr/>
-          <p:nvPr/>
-        </p:nvSpPr>
-        <p:spPr>
-          <a:xfrm>
-            <a:off x="1874520" y="4096512"/>
-            <a:ext cx="6903720" cy="658368"/>
-          </a:xfrm>
-          <a:prstGeom prst="rect">
-            <a:avLst>
-              <a:gd name="adj" fmla="val 8333"/>
-            </a:avLst>
-          </a:prstGeom>
-          <a:solidFill>
-            <a:srgbClr val="FCE7F3"/>
-          </a:solidFill>
-          <a:ln w="12700">
-            <a:solidFill>
-              <a:srgbClr val="DB2777"/>
-            </a:solidFill>
-            <a:prstDash val="solid"/>
-          </a:ln>
-        </p:spPr>
-      </p:sp>
-      <p:sp>
-        <p:nvSpPr>
-          <p:cNvPr id="42" name="Shape 40"/>
-          <p:cNvSpPr/>
-          <p:nvPr/>
-        </p:nvSpPr>
-        <p:spPr>
-          <a:xfrm>
-            <a:off x="2023872" y="4169664"/>
+              <a:t>p</a:t>
+            </a:r>
+            <a:endParaRPr lang="en-US" sz="900" dirty="0"/>
+          </a:p>
+        </p:txBody>
+      </p:sp>
+      <p:sp>
+        <p:nvSpPr>
+          <p:cNvPr id="43" name="Shape 41"/>
+          <p:cNvSpPr/>
+          <p:nvPr/>
+        </p:nvSpPr>
+        <p:spPr>
+          <a:xfrm>
+            <a:off x="3942207" y="4169664"/>
             <a:ext cx="685800" cy="475488"/>
           </a:xfrm>
           <a:prstGeom prst="rect">
@@ -32167,13 +33043,13 @@
       </p:sp>
       <p:sp>
         <p:nvSpPr>
-          <p:cNvPr id="43" name="Text 41"/>
-          <p:cNvSpPr/>
-          <p:nvPr/>
-        </p:nvSpPr>
-        <p:spPr>
-          <a:xfrm>
-            <a:off x="2023872" y="4169664"/>
+          <p:cNvPr id="44" name="Text 42"/>
+          <p:cNvSpPr/>
+          <p:nvPr/>
+        </p:nvSpPr>
+        <p:spPr>
+          <a:xfrm>
+            <a:off x="3942207" y="4169664"/>
             <a:ext cx="685800" cy="475488"/>
           </a:xfrm>
           <a:prstGeom prst="rect">
@@ -32198,7 +33074,7 @@
                 <a:ea typeface="Trebuchet MS" pitchFamily="34" charset="-122"/>
                 <a:cs typeface="Trebuchet MS" pitchFamily="34" charset="-120"/>
               </a:rPr>
-              <a:t>o</a:t>
+              <a:t>l</a:t>
             </a:r>
             <a:endParaRPr lang="en-US" sz="900" dirty="0"/>
           </a:p>
@@ -32206,13 +33082,13 @@
       </p:sp>
       <p:sp>
         <p:nvSpPr>
-          <p:cNvPr id="44" name="Shape 42"/>
-          <p:cNvSpPr/>
-          <p:nvPr/>
-        </p:nvSpPr>
-        <p:spPr>
-          <a:xfrm>
-            <a:off x="2831592" y="4169664"/>
+          <p:cNvPr id="45" name="Shape 43"/>
+          <p:cNvSpPr/>
+          <p:nvPr/>
+        </p:nvSpPr>
+        <p:spPr>
+          <a:xfrm>
+            <a:off x="4850892" y="4169664"/>
             <a:ext cx="685800" cy="475488"/>
           </a:xfrm>
           <a:prstGeom prst="rect">
@@ -32233,13 +33109,13 @@
       </p:sp>
       <p:sp>
         <p:nvSpPr>
-          <p:cNvPr id="45" name="Text 43"/>
-          <p:cNvSpPr/>
-          <p:nvPr/>
-        </p:nvSpPr>
-        <p:spPr>
-          <a:xfrm>
-            <a:off x="2831592" y="4169664"/>
+          <p:cNvPr id="46" name="Text 44"/>
+          <p:cNvSpPr/>
+          <p:nvPr/>
+        </p:nvSpPr>
+        <p:spPr>
+          <a:xfrm>
+            <a:off x="4850892" y="4169664"/>
             <a:ext cx="685800" cy="475488"/>
           </a:xfrm>
           <a:prstGeom prst="rect">
@@ -32264,7 +33140,7 @@
                 <a:ea typeface="Trebuchet MS" pitchFamily="34" charset="-122"/>
                 <a:cs typeface="Trebuchet MS" pitchFamily="34" charset="-120"/>
               </a:rPr>
-              <a:t>v</a:t>
+              <a:t>oa</a:t>
             </a:r>
             <a:endParaRPr lang="en-US" sz="900" dirty="0"/>
           </a:p>
@@ -32272,13 +33148,13 @@
       </p:sp>
       <p:sp>
         <p:nvSpPr>
-          <p:cNvPr id="46" name="Shape 44"/>
-          <p:cNvSpPr/>
-          <p:nvPr/>
-        </p:nvSpPr>
-        <p:spPr>
-          <a:xfrm>
-            <a:off x="3639312" y="4169664"/>
+          <p:cNvPr id="47" name="Shape 45"/>
+          <p:cNvSpPr/>
+          <p:nvPr/>
+        </p:nvSpPr>
+        <p:spPr>
+          <a:xfrm>
+            <a:off x="5759577" y="4169664"/>
             <a:ext cx="685800" cy="475488"/>
           </a:xfrm>
           <a:prstGeom prst="rect">
@@ -32299,13 +33175,13 @@
       </p:sp>
       <p:sp>
         <p:nvSpPr>
-          <p:cNvPr id="47" name="Text 45"/>
-          <p:cNvSpPr/>
-          <p:nvPr/>
-        </p:nvSpPr>
-        <p:spPr>
-          <a:xfrm>
-            <a:off x="3639312" y="4169664"/>
+          <p:cNvPr id="48" name="Text 46"/>
+          <p:cNvSpPr/>
+          <p:nvPr/>
+        </p:nvSpPr>
+        <p:spPr>
+          <a:xfrm>
+            <a:off x="5759577" y="4169664"/>
             <a:ext cx="685800" cy="475488"/>
           </a:xfrm>
           <a:prstGeom prst="rect">
@@ -32330,7 +33206,7 @@
                 <a:ea typeface="Trebuchet MS" pitchFamily="34" charset="-122"/>
                 <a:cs typeface="Trebuchet MS" pitchFamily="34" charset="-120"/>
               </a:rPr>
-              <a:t>er</a:t>
+              <a:t>d</a:t>
             </a:r>
             <a:endParaRPr lang="en-US" sz="900" dirty="0"/>
           </a:p>
@@ -32338,13 +33214,13 @@
       </p:sp>
       <p:sp>
         <p:nvSpPr>
-          <p:cNvPr id="48" name="Shape 46"/>
-          <p:cNvSpPr/>
-          <p:nvPr/>
-        </p:nvSpPr>
-        <p:spPr>
-          <a:xfrm>
-            <a:off x="4447032" y="4169664"/>
+          <p:cNvPr id="49" name="Shape 47"/>
+          <p:cNvSpPr/>
+          <p:nvPr/>
+        </p:nvSpPr>
+        <p:spPr>
+          <a:xfrm>
+            <a:off x="6668262" y="4169664"/>
             <a:ext cx="685800" cy="475488"/>
           </a:xfrm>
           <a:prstGeom prst="rect">
@@ -32365,13 +33241,13 @@
       </p:sp>
       <p:sp>
         <p:nvSpPr>
-          <p:cNvPr id="49" name="Text 47"/>
-          <p:cNvSpPr/>
-          <p:nvPr/>
-        </p:nvSpPr>
-        <p:spPr>
-          <a:xfrm>
-            <a:off x="4447032" y="4169664"/>
+          <p:cNvPr id="50" name="Text 48"/>
+          <p:cNvSpPr/>
+          <p:nvPr/>
+        </p:nvSpPr>
+        <p:spPr>
+          <a:xfrm>
+            <a:off x="6668262" y="4169664"/>
             <a:ext cx="685800" cy="475488"/>
           </a:xfrm>
           <a:prstGeom prst="rect">
@@ -32396,7 +33272,7 @@
                 <a:ea typeface="Trebuchet MS" pitchFamily="34" charset="-122"/>
                 <a:cs typeface="Trebuchet MS" pitchFamily="34" charset="-120"/>
               </a:rPr>
-              <a:t>l</a:t>
+              <a:t>i</a:t>
             </a:r>
             <a:endParaRPr lang="en-US" sz="900" dirty="0"/>
           </a:p>
@@ -32404,13 +33280,13 @@
       </p:sp>
       <p:sp>
         <p:nvSpPr>
-          <p:cNvPr id="50" name="Shape 48"/>
-          <p:cNvSpPr/>
-          <p:nvPr/>
-        </p:nvSpPr>
-        <p:spPr>
-          <a:xfrm>
-            <a:off x="5254752" y="4169664"/>
+          <p:cNvPr id="51" name="Shape 49"/>
+          <p:cNvSpPr/>
+          <p:nvPr/>
+        </p:nvSpPr>
+        <p:spPr>
+          <a:xfrm>
+            <a:off x="7576947" y="4169664"/>
             <a:ext cx="685800" cy="475488"/>
           </a:xfrm>
           <a:prstGeom prst="rect">
@@ -32431,211 +33307,13 @@
       </p:sp>
       <p:sp>
         <p:nvSpPr>
-          <p:cNvPr id="51" name="Text 49"/>
-          <p:cNvSpPr/>
-          <p:nvPr/>
-        </p:nvSpPr>
-        <p:spPr>
-          <a:xfrm>
-            <a:off x="5254752" y="4169664"/>
-            <a:ext cx="685800" cy="475488"/>
-          </a:xfrm>
-          <a:prstGeom prst="rect">
-            <a:avLst/>
-          </a:prstGeom>
-          <a:noFill/>
-          <a:ln/>
-        </p:spPr>
-        <p:txBody>
-          <a:bodyPr wrap="square" lIns="0" tIns="0" rIns="0" bIns="0" rtlCol="0" anchor="ctr"/>
-          <a:lstStyle/>
-          <a:p>
-            <a:pPr algn="ctr" indent="0" marL="0">
-              <a:buNone/>
-            </a:pPr>
-            <a:r>
-              <a:rPr lang="en-US" sz="900" b="1" dirty="0">
-                <a:solidFill>
-                  <a:srgbClr val="9D174D"/>
-                </a:solidFill>
-                <a:latin typeface="Trebuchet MS" pitchFamily="34" charset="0"/>
-                <a:ea typeface="Trebuchet MS" pitchFamily="34" charset="-122"/>
-                <a:cs typeface="Trebuchet MS" pitchFamily="34" charset="-120"/>
-              </a:rPr>
-              <a:t>oa</a:t>
-            </a:r>
-            <a:endParaRPr lang="en-US" sz="900" dirty="0"/>
-          </a:p>
-        </p:txBody>
-      </p:sp>
-      <p:sp>
-        <p:nvSpPr>
-          <p:cNvPr id="52" name="Shape 50"/>
-          <p:cNvSpPr/>
-          <p:nvPr/>
-        </p:nvSpPr>
-        <p:spPr>
-          <a:xfrm>
-            <a:off x="6062472" y="4169664"/>
-            <a:ext cx="685800" cy="475488"/>
-          </a:xfrm>
-          <a:prstGeom prst="rect">
-            <a:avLst>
-              <a:gd name="adj" fmla="val 7692"/>
-            </a:avLst>
-          </a:prstGeom>
-          <a:solidFill>
-            <a:srgbClr val="FFFFFF"/>
-          </a:solidFill>
-          <a:ln w="12700">
-            <a:solidFill>
-              <a:srgbClr val="DB2777"/>
-            </a:solidFill>
-            <a:prstDash val="solid"/>
-          </a:ln>
-        </p:spPr>
-      </p:sp>
-      <p:sp>
-        <p:nvSpPr>
-          <p:cNvPr id="53" name="Text 51"/>
-          <p:cNvSpPr/>
-          <p:nvPr/>
-        </p:nvSpPr>
-        <p:spPr>
-          <a:xfrm>
-            <a:off x="6062472" y="4169664"/>
-            <a:ext cx="685800" cy="475488"/>
-          </a:xfrm>
-          <a:prstGeom prst="rect">
-            <a:avLst/>
-          </a:prstGeom>
-          <a:noFill/>
-          <a:ln/>
-        </p:spPr>
-        <p:txBody>
-          <a:bodyPr wrap="square" lIns="0" tIns="0" rIns="0" bIns="0" rtlCol="0" anchor="ctr"/>
-          <a:lstStyle/>
-          <a:p>
-            <a:pPr algn="ctr" indent="0" marL="0">
-              <a:buNone/>
-            </a:pPr>
-            <a:r>
-              <a:rPr lang="en-US" sz="900" b="1" dirty="0">
-                <a:solidFill>
-                  <a:srgbClr val="9D174D"/>
-                </a:solidFill>
-                <a:latin typeface="Trebuchet MS" pitchFamily="34" charset="0"/>
-                <a:ea typeface="Trebuchet MS" pitchFamily="34" charset="-122"/>
-                <a:cs typeface="Trebuchet MS" pitchFamily="34" charset="-120"/>
-              </a:rPr>
-              <a:t>d</a:t>
-            </a:r>
-            <a:endParaRPr lang="en-US" sz="900" dirty="0"/>
-          </a:p>
-        </p:txBody>
-      </p:sp>
-      <p:sp>
-        <p:nvSpPr>
-          <p:cNvPr id="54" name="Shape 52"/>
-          <p:cNvSpPr/>
-          <p:nvPr/>
-        </p:nvSpPr>
-        <p:spPr>
-          <a:xfrm>
-            <a:off x="6870192" y="4169664"/>
-            <a:ext cx="685800" cy="475488"/>
-          </a:xfrm>
-          <a:prstGeom prst="rect">
-            <a:avLst>
-              <a:gd name="adj" fmla="val 7692"/>
-            </a:avLst>
-          </a:prstGeom>
-          <a:solidFill>
-            <a:srgbClr val="FFFFFF"/>
-          </a:solidFill>
-          <a:ln w="12700">
-            <a:solidFill>
-              <a:srgbClr val="DB2777"/>
-            </a:solidFill>
-            <a:prstDash val="solid"/>
-          </a:ln>
-        </p:spPr>
-      </p:sp>
-      <p:sp>
-        <p:nvSpPr>
-          <p:cNvPr id="55" name="Text 53"/>
-          <p:cNvSpPr/>
-          <p:nvPr/>
-        </p:nvSpPr>
-        <p:spPr>
-          <a:xfrm>
-            <a:off x="6870192" y="4169664"/>
-            <a:ext cx="685800" cy="475488"/>
-          </a:xfrm>
-          <a:prstGeom prst="rect">
-            <a:avLst/>
-          </a:prstGeom>
-          <a:noFill/>
-          <a:ln/>
-        </p:spPr>
-        <p:txBody>
-          <a:bodyPr wrap="square" lIns="0" tIns="0" rIns="0" bIns="0" rtlCol="0" anchor="ctr"/>
-          <a:lstStyle/>
-          <a:p>
-            <a:pPr algn="ctr" indent="0" marL="0">
-              <a:buNone/>
-            </a:pPr>
-            <a:r>
-              <a:rPr lang="en-US" sz="900" b="1" dirty="0">
-                <a:solidFill>
-                  <a:srgbClr val="9D174D"/>
-                </a:solidFill>
-                <a:latin typeface="Trebuchet MS" pitchFamily="34" charset="0"/>
-                <a:ea typeface="Trebuchet MS" pitchFamily="34" charset="-122"/>
-                <a:cs typeface="Trebuchet MS" pitchFamily="34" charset="-120"/>
-              </a:rPr>
-              <a:t>i</a:t>
-            </a:r>
-            <a:endParaRPr lang="en-US" sz="900" dirty="0"/>
-          </a:p>
-        </p:txBody>
-      </p:sp>
-      <p:sp>
-        <p:nvSpPr>
-          <p:cNvPr id="56" name="Shape 54"/>
-          <p:cNvSpPr/>
-          <p:nvPr/>
-        </p:nvSpPr>
-        <p:spPr>
-          <a:xfrm>
-            <a:off x="7677912" y="4169664"/>
-            <a:ext cx="685800" cy="475488"/>
-          </a:xfrm>
-          <a:prstGeom prst="rect">
-            <a:avLst>
-              <a:gd name="adj" fmla="val 7692"/>
-            </a:avLst>
-          </a:prstGeom>
-          <a:solidFill>
-            <a:srgbClr val="FFFFFF"/>
-          </a:solidFill>
-          <a:ln w="12700">
-            <a:solidFill>
-              <a:srgbClr val="DB2777"/>
-            </a:solidFill>
-            <a:prstDash val="solid"/>
-          </a:ln>
-        </p:spPr>
-      </p:sp>
-      <p:sp>
-        <p:nvSpPr>
-          <p:cNvPr id="57" name="Text 55"/>
-          <p:cNvSpPr/>
-          <p:nvPr/>
-        </p:nvSpPr>
-        <p:spPr>
-          <a:xfrm>
-            <a:off x="7677912" y="4169664"/>
+          <p:cNvPr id="52" name="Text 50"/>
+          <p:cNvSpPr/>
+          <p:nvPr/>
+        </p:nvSpPr>
+        <p:spPr>
+          <a:xfrm>
+            <a:off x="7576947" y="4169664"/>
             <a:ext cx="685800" cy="475488"/>
           </a:xfrm>
           <a:prstGeom prst="rect">
@@ -32952,7 +33630,7 @@
                 <a:ea typeface="Calibri" pitchFamily="34" charset="-122"/>
                 <a:cs typeface="Calibri" pitchFamily="34" charset="-120"/>
               </a:rPr>
-              <a:t>Word Labs  •  wordlabs.app  •  Root: 'load' = to carry or burden weight</a:t>
+              <a:t>Word Labs  •  wordlabs.app  •  Root: 'load' = to carry or bear weight</a:t>
             </a:r>
             <a:endParaRPr lang="en-US" sz="800" dirty="0"/>
           </a:p>
@@ -34121,7 +34799,7 @@
                 <a:ea typeface="Calibri" pitchFamily="34" charset="-122"/>
                 <a:cs typeface="Calibri" pitchFamily="34" charset="-120"/>
               </a:rPr>
-              <a:t>Word Labs  •  wordlabs.app  •  Root: 'load' = to carry or burden weight</a:t>
+              <a:t>Word Labs  •  wordlabs.app  •  Root: 'load' = to carry or bear weight</a:t>
             </a:r>
             <a:endParaRPr lang="en-US" sz="800" dirty="0"/>
           </a:p>
@@ -34614,7 +35292,7 @@
                 <a:ea typeface="Trebuchet MS" pitchFamily="34" charset="-122"/>
                 <a:cs typeface="Trebuchet MS" pitchFamily="34" charset="-120"/>
               </a:rPr>
-              <a:t>over-</a:t>
+              <a:t>re-</a:t>
             </a:r>
             <a:endParaRPr lang="en-US" sz="1300" dirty="0"/>
           </a:p>
@@ -34767,7 +35445,7 @@
                 <a:ea typeface="Trebuchet MS" pitchFamily="34" charset="-122"/>
                 <a:cs typeface="Trebuchet MS" pitchFamily="34" charset="-120"/>
               </a:rPr>
-              <a:t>re-</a:t>
+              <a:t>over-</a:t>
             </a:r>
             <a:endParaRPr lang="en-US" sz="1300" dirty="0"/>
           </a:p>
@@ -35333,7 +36011,7 @@
                 <a:ea typeface="Trebuchet MS" pitchFamily="34" charset="-122"/>
                 <a:cs typeface="Trebuchet MS" pitchFamily="34" charset="-120"/>
               </a:rPr>
-              <a:t>overload</a:t>
+              <a:t>reload</a:t>
             </a:r>
             <a:endParaRPr lang="en-US" sz="1200" dirty="0"/>
           </a:p>
@@ -35399,7 +36077,7 @@
                 <a:ea typeface="Trebuchet MS" pitchFamily="34" charset="-122"/>
                 <a:cs typeface="Trebuchet MS" pitchFamily="34" charset="-120"/>
               </a:rPr>
-              <a:t>reload</a:t>
+              <a:t>overload</a:t>
             </a:r>
             <a:endParaRPr lang="en-US" sz="1200" dirty="0"/>
           </a:p>
@@ -35729,7 +36407,7 @@
                 <a:ea typeface="Trebuchet MS" pitchFamily="34" charset="-122"/>
                 <a:cs typeface="Trebuchet MS" pitchFamily="34" charset="-120"/>
               </a:rPr>
-              <a:t>loader</a:t>
+              <a:t>unloading</a:t>
             </a:r>
             <a:endParaRPr lang="en-US" sz="1200" dirty="0"/>
           </a:p>
@@ -36021,7 +36699,7 @@
                 <a:ea typeface="Calibri" pitchFamily="34" charset="-122"/>
                 <a:cs typeface="Calibri" pitchFamily="34" charset="-120"/>
               </a:rPr>
-              <a:t>Word Labs  •  wordlabs.app  •  Root: 'load' = to carry or burden weight</a:t>
+              <a:t>Word Labs  •  wordlabs.app  •  Root: 'load' = to carry or bear weight</a:t>
             </a:r>
             <a:endParaRPr lang="en-US" sz="800" dirty="0"/>
           </a:p>
@@ -36185,7 +36863,7 @@
                 <a:ea typeface="Calibri" pitchFamily="34" charset="-122"/>
                 <a:cs typeface="Calibri" pitchFamily="34" charset="-120"/>
               </a:rPr>
-              <a:t>The core part of a word carrying its basic meaning. For example, 'load' means 'to carry or burden weight'.</a:t>
+              <a:t>The core part of a word carrying its basic meaning. For example, 'load' means 'to carry or bear weight'.</a:t>
             </a:r>
             <a:endParaRPr lang="en-US" sz="1350" dirty="0"/>
           </a:p>
@@ -36805,7 +37483,7 @@
                 <a:ea typeface="Calibri" pitchFamily="34" charset="-122"/>
                 <a:cs typeface="Calibri" pitchFamily="34" charset="-120"/>
               </a:rPr>
-              <a:t>Word Labs  •  wordlabs.app  •  Root: 'load' = to carry or burden weight</a:t>
+              <a:t>Word Labs  •  wordlabs.app  •  Root: 'load' = to carry or bear weight</a:t>
             </a:r>
             <a:endParaRPr lang="en-US" sz="800" dirty="0"/>
           </a:p>
@@ -36917,7 +37595,7 @@
                 <a:ea typeface="Calibri" pitchFamily="34" charset="-122"/>
                 <a:cs typeface="Calibri" pitchFamily="34" charset="-120"/>
               </a:rPr>
-              <a:t>1.  The word 'download' contains the root 'load'.</a:t>
+              <a:t>1.  The word 'overload' means to put too much onto something.</a:t>
             </a:r>
             <a:endParaRPr lang="en-US" sz="1300" dirty="0"/>
           </a:p>
@@ -37056,7 +37734,7 @@
                 <a:ea typeface="Calibri" pitchFamily="34" charset="-122"/>
                 <a:cs typeface="Calibri" pitchFamily="34" charset="-120"/>
               </a:rPr>
-              <a:t>2.  The prefix 'over' in 'overload' means 'below' or 'under'.</a:t>
+              <a:t>2.  The word 'download' contains the root 'load'.</a:t>
             </a:r>
             <a:endParaRPr lang="en-US" sz="1300" dirty="0"/>
           </a:p>
@@ -37079,11 +37757,11 @@
             </a:avLst>
           </a:prstGeom>
           <a:solidFill>
-            <a:srgbClr val="FEE2E2"/>
-          </a:solidFill>
-          <a:ln w="12700">
-            <a:solidFill>
-              <a:srgbClr val="DC2626"/>
+            <a:srgbClr val="DCFCE7"/>
+          </a:solidFill>
+          <a:ln w="12700">
+            <a:solidFill>
+              <a:srgbClr val="16A34A"/>
             </a:solidFill>
             <a:prstDash val="solid"/>
           </a:ln>
@@ -37116,13 +37794,13 @@
             <a:r>
               <a:rPr lang="en-US" sz="1100" b="1" dirty="0">
                 <a:solidFill>
-                  <a:srgbClr val="DC2626"/>
+                  <a:srgbClr val="16A34A"/>
                 </a:solidFill>
                 <a:latin typeface="Trebuchet MS" pitchFamily="34" charset="0"/>
                 <a:ea typeface="Trebuchet MS" pitchFamily="34" charset="-122"/>
                 <a:cs typeface="Trebuchet MS" pitchFamily="34" charset="-120"/>
               </a:rPr>
-              <a:t>FALSE</a:t>
+              <a:t>TRUE</a:t>
             </a:r>
             <a:endParaRPr lang="en-US" sz="1100" dirty="0"/>
           </a:p>
@@ -37195,7 +37873,7 @@
                 <a:ea typeface="Calibri" pitchFamily="34" charset="-122"/>
                 <a:cs typeface="Calibri" pitchFamily="34" charset="-120"/>
               </a:rPr>
-              <a:t>3.  The word 'unload' means to remove things that were packed or carried.</a:t>
+              <a:t>3.  The suffix '-able' cannot be added to 'load' to make a real word.</a:t>
             </a:r>
             <a:endParaRPr lang="en-US" sz="1300" dirty="0"/>
           </a:p>
@@ -37218,11 +37896,11 @@
             </a:avLst>
           </a:prstGeom>
           <a:solidFill>
-            <a:srgbClr val="DCFCE7"/>
-          </a:solidFill>
-          <a:ln w="12700">
-            <a:solidFill>
-              <a:srgbClr val="16A34A"/>
+            <a:srgbClr val="FEE2E2"/>
+          </a:solidFill>
+          <a:ln w="12700">
+            <a:solidFill>
+              <a:srgbClr val="DC2626"/>
             </a:solidFill>
             <a:prstDash val="solid"/>
           </a:ln>
@@ -37255,13 +37933,13 @@
             <a:r>
               <a:rPr lang="en-US" sz="1100" b="1" dirty="0">
                 <a:solidFill>
-                  <a:srgbClr val="16A34A"/>
+                  <a:srgbClr val="DC2626"/>
                 </a:solidFill>
                 <a:latin typeface="Trebuchet MS" pitchFamily="34" charset="0"/>
                 <a:ea typeface="Trebuchet MS" pitchFamily="34" charset="-122"/>
                 <a:cs typeface="Trebuchet MS" pitchFamily="34" charset="-120"/>
               </a:rPr>
-              <a:t>TRUE</a:t>
+              <a:t>FALSE</a:t>
             </a:r>
             <a:endParaRPr lang="en-US" sz="1100" dirty="0"/>
           </a:p>
@@ -37334,7 +38012,7 @@
                 <a:ea typeface="Calibri" pitchFamily="34" charset="-122"/>
                 <a:cs typeface="Calibri" pitchFamily="34" charset="-120"/>
               </a:rPr>
-              <a:t>4.  The suffix '-er' in 'loader' means a person or thing that does something.</a:t>
+              <a:t>4.  The word 'unload' contains the prefix 'un' meaning 'not' or 'reverse'.</a:t>
             </a:r>
             <a:endParaRPr lang="en-US" sz="1300" dirty="0"/>
           </a:p>
@@ -37473,7 +38151,7 @@
                 <a:ea typeface="Calibri" pitchFamily="34" charset="-122"/>
                 <a:cs typeface="Calibri" pitchFamily="34" charset="-120"/>
               </a:rPr>
-              <a:t>5.  The word 'reload' means to load something for the very first time.</a:t>
+              <a:t>5.  The root 'load' means to rest or sleep.</a:t>
             </a:r>
             <a:endParaRPr lang="en-US" sz="1300" dirty="0"/>
           </a:p>
@@ -37831,7 +38509,7 @@
                 <a:ea typeface="Calibri" pitchFamily="34" charset="-122"/>
                 <a:cs typeface="Calibri" pitchFamily="34" charset="-120"/>
               </a:rPr>
-              <a:t>Word Labs  •  wordlabs.app  •  Root: 'load' = to carry or burden weight</a:t>
+              <a:t>Word Labs  •  wordlabs.app  •  Root: 'load' = to carry or bear weight</a:t>
             </a:r>
             <a:endParaRPr lang="en-US" sz="800" dirty="0"/>
           </a:p>
@@ -37968,7 +38646,7 @@
                 <a:ea typeface="Trebuchet MS" pitchFamily="34" charset="-122"/>
                 <a:cs typeface="Trebuchet MS" pitchFamily="34" charset="-120"/>
               </a:rPr>
-              <a:t>to carry or burden weight</a:t>
+              <a:t>to carry or bear weight</a:t>
             </a:r>
             <a:endParaRPr lang="en-US" sz="2000" dirty="0"/>
           </a:p>
@@ -38178,7 +38856,7 @@
                 <a:ea typeface="Trebuchet MS" pitchFamily="34" charset="-122"/>
                 <a:cs typeface="Trebuchet MS" pitchFamily="34" charset="-120"/>
               </a:rPr>
-              <a:t>overload</a:t>
+              <a:t>reload</a:t>
             </a:r>
             <a:endParaRPr lang="en-US" sz="1300" dirty="0"/>
           </a:p>
@@ -38244,7 +38922,7 @@
                 <a:ea typeface="Trebuchet MS" pitchFamily="34" charset="-122"/>
                 <a:cs typeface="Trebuchet MS" pitchFamily="34" charset="-120"/>
               </a:rPr>
-              <a:t>reload</a:t>
+              <a:t>overload</a:t>
             </a:r>
             <a:endParaRPr lang="en-US" sz="1300" dirty="0"/>
           </a:p>
@@ -38800,7 +39478,7 @@
                 <a:ea typeface="Calibri" pitchFamily="34" charset="-122"/>
                 <a:cs typeface="Calibri" pitchFamily="34" charset="-120"/>
               </a:rPr>
-              <a:t>Word Labs  •  wordlabs.app  •  Root: 'load' = to carry or burden weight</a:t>
+              <a:t>Word Labs  •  wordlabs.app  •  Root: 'load' = to carry or bear weight</a:t>
             </a:r>
             <a:endParaRPr lang="en-US" sz="800" dirty="0"/>
           </a:p>
@@ -39293,7 +39971,7 @@
                 <a:ea typeface="Trebuchet MS" pitchFamily="34" charset="-122"/>
                 <a:cs typeface="Trebuchet MS" pitchFamily="34" charset="-120"/>
               </a:rPr>
-              <a:t>over-</a:t>
+              <a:t>re-</a:t>
             </a:r>
             <a:endParaRPr lang="en-US" sz="1300" dirty="0"/>
           </a:p>
@@ -39446,7 +40124,7 @@
                 <a:ea typeface="Trebuchet MS" pitchFamily="34" charset="-122"/>
                 <a:cs typeface="Trebuchet MS" pitchFamily="34" charset="-120"/>
               </a:rPr>
-              <a:t>re-</a:t>
+              <a:t>over-</a:t>
             </a:r>
             <a:endParaRPr lang="en-US" sz="1300" dirty="0"/>
           </a:p>
@@ -40574,7 +41252,7 @@
                 <a:ea typeface="Calibri" pitchFamily="34" charset="-122"/>
                 <a:cs typeface="Calibri" pitchFamily="34" charset="-120"/>
               </a:rPr>
-              <a:t>Word Labs  •  wordlabs.app  •  Root: 'load' = to carry or burden weight</a:t>
+              <a:t>Word Labs  •  wordlabs.app  •  Root: 'load' = to carry or bear weight</a:t>
             </a:r>
             <a:endParaRPr lang="en-US" sz="800" dirty="0"/>
           </a:p>
@@ -40752,7 +41430,7 @@
                 <a:ea typeface="Calibri" pitchFamily="34" charset="-122"/>
                 <a:cs typeface="Calibri" pitchFamily="34" charset="-120"/>
               </a:rPr>
-              <a:t>To take things off or out of something, like removing boxes from a truck.</a:t>
+              <a:t>To take things off or out of something, like removing bags from a car boot.</a:t>
             </a:r>
             <a:endParaRPr lang="en-US" sz="1200" dirty="0"/>
           </a:p>
@@ -40825,7 +41503,7 @@
                 <a:ea typeface="Trebuchet MS" pitchFamily="34" charset="-122"/>
                 <a:cs typeface="Trebuchet MS" pitchFamily="34" charset="-120"/>
               </a:rPr>
-              <a:t>overload</a:t>
+              <a:t>reload</a:t>
             </a:r>
             <a:endParaRPr lang="en-US" sz="1200" dirty="0"/>
           </a:p>
@@ -40891,7 +41569,7 @@
                 <a:ea typeface="Calibri" pitchFamily="34" charset="-122"/>
                 <a:cs typeface="Calibri" pitchFamily="34" charset="-120"/>
               </a:rPr>
-              <a:t>The action of putting things onto or into something right now.</a:t>
+              <a:t>The action of putting things onto something, like loading boxes onto a truck.</a:t>
             </a:r>
             <a:endParaRPr lang="en-US" sz="1200" dirty="0"/>
           </a:p>
@@ -40964,7 +41642,7 @@
                 <a:ea typeface="Trebuchet MS" pitchFamily="34" charset="-122"/>
                 <a:cs typeface="Trebuchet MS" pitchFamily="34" charset="-120"/>
               </a:rPr>
-              <a:t>reload</a:t>
+              <a:t>overload</a:t>
             </a:r>
             <a:endParaRPr lang="en-US" sz="1200" dirty="0"/>
           </a:p>
@@ -41030,7 +41708,7 @@
                 <a:ea typeface="Calibri" pitchFamily="34" charset="-122"/>
                 <a:cs typeface="Calibri" pitchFamily="34" charset="-120"/>
               </a:rPr>
-              <a:t>To load something again, like refilling a dishwasher or restarting a page.</a:t>
+              <a:t>To put too much weight or too many things onto something so it can't cope.</a:t>
             </a:r>
             <a:endParaRPr lang="en-US" sz="1200" dirty="0"/>
           </a:p>
@@ -41169,7 +41847,7 @@
                 <a:ea typeface="Calibri" pitchFamily="34" charset="-122"/>
                 <a:cs typeface="Calibri" pitchFamily="34" charset="-120"/>
               </a:rPr>
-              <a:t>To send files or information from your device to the internet.</a:t>
+              <a:t>To send or copy files from your device up to the internet.</a:t>
             </a:r>
             <a:endParaRPr lang="en-US" sz="1200" dirty="0"/>
           </a:p>
@@ -41308,7 +41986,7 @@
                 <a:ea typeface="Calibri" pitchFamily="34" charset="-122"/>
                 <a:cs typeface="Calibri" pitchFamily="34" charset="-120"/>
               </a:rPr>
-              <a:t>To copy files or information from the internet onto your device.</a:t>
+              <a:t>To copy or move files from the internet onto your device.</a:t>
             </a:r>
             <a:endParaRPr lang="en-US" sz="1200" dirty="0"/>
           </a:p>
@@ -41447,7 +42125,7 @@
                 <a:ea typeface="Calibri" pitchFamily="34" charset="-122"/>
                 <a:cs typeface="Calibri" pitchFamily="34" charset="-120"/>
               </a:rPr>
-              <a:t>Describes something that is filled up and carrying a lot of things.</a:t>
+              <a:t>Describes something that has been filled up or had things put onto it.</a:t>
             </a:r>
             <a:endParaRPr lang="en-US" sz="1200" dirty="0"/>
           </a:p>
@@ -41586,7 +42264,7 @@
                 <a:ea typeface="Calibri" pitchFamily="34" charset="-122"/>
                 <a:cs typeface="Calibri" pitchFamily="34" charset="-120"/>
               </a:rPr>
-              <a:t>To put too much weight or too many things onto something.</a:t>
+              <a:t>To load something again, like filling up a truck a second time.</a:t>
             </a:r>
             <a:endParaRPr lang="en-US" sz="1200" dirty="0"/>
           </a:p>
@@ -41878,7 +42556,7 @@
                 <a:ea typeface="Calibri" pitchFamily="34" charset="-122"/>
                 <a:cs typeface="Calibri" pitchFamily="34" charset="-120"/>
               </a:rPr>
-              <a:t>Word Labs  •  wordlabs.app  •  Root: 'load' = to carry or burden weight</a:t>
+              <a:t>Word Labs  •  wordlabs.app  •  Root: 'load' = to carry or bear weight</a:t>
             </a:r>
             <a:endParaRPr lang="en-US" sz="800" dirty="0"/>
           </a:p>
@@ -42081,7 +42759,7 @@
                 <a:ea typeface="Calibri" pitchFamily="34" charset="-122"/>
                 <a:cs typeface="Calibri" pitchFamily="34" charset="-120"/>
               </a:rPr>
-              <a:t>The removalist had to unload all the heavy boxes from the back of the truck before it started to rain.</a:t>
+              <a:t>The removalist had to unload all the heavy furniture from the truck before it got dark.</a:t>
             </a:r>
             <a:endParaRPr lang="en-US" sz="1500" dirty="0"/>
           </a:p>
@@ -42245,7 +42923,7 @@
                 <a:ea typeface="Calibri" pitchFamily="34" charset="-122"/>
                 <a:cs typeface="Calibri" pitchFamily="34" charset="-120"/>
               </a:rPr>
-              <a:t>Mia tried to download the new app, but the internet was too slow and the loading took forever.</a:t>
+              <a:t>The students had to download the maths worksheet from the school website before class.</a:t>
             </a:r>
             <a:endParaRPr lang="en-US" sz="1500" dirty="0"/>
           </a:p>
@@ -42409,7 +43087,7 @@
                 <a:ea typeface="Calibri" pitchFamily="34" charset="-122"/>
                 <a:cs typeface="Calibri" pitchFamily="34" charset="-120"/>
               </a:rPr>
-              <a:t>The teacher warned us not to overload our school bags because carrying too much weight can hurt your back.</a:t>
+              <a:t>The farmer was careful not to overload the trailer with too many bales of hay.</a:t>
             </a:r>
             <a:endParaRPr lang="en-US" sz="1500" dirty="0"/>
           </a:p>
